--- a/docs/diagrams/architecture.pptx
+++ b/docs/diagrams/architecture.pptx
@@ -1524,75 +1524,33 @@
           </a:effectLst>
         </p:spPr>
       </p:sp>
-      <p:sp>
-        <p:nvSpPr>
-          <p:cNvPr id="15" name="Shape 13"/>
-          <p:cNvSpPr/>
-          <p:nvPr/>
-        </p:nvSpPr>
+      <p:pic>
+        <p:nvPicPr>
+          <p:cNvPr id="15" name="Image 0" descr="preencoded.png">    </p:cNvPr>
+          <p:cNvPicPr>
+            <a:picLocks noChangeAspect="1"/>
+          </p:cNvPicPr>
+          <p:nvPr/>
+        </p:nvPicPr>
+        <p:blipFill>
+          <a:blip r:embed="rId1"/>
+          <a:stretch>
+            <a:fillRect/>
+          </a:stretch>
+        </p:blipFill>
         <p:spPr>
           <a:xfrm>
             <a:off x="489204" y="1623060"/>
             <a:ext cx="237744" cy="237744"/>
           </a:xfrm>
-          <a:prstGeom prst="roundRect">
-            <a:avLst>
-              <a:gd name="adj" fmla="val 11538"/>
-            </a:avLst>
-          </a:prstGeom>
-          <a:solidFill>
-            <a:srgbClr val="F3F2F1"/>
-          </a:solidFill>
-          <a:ln w="9525">
-            <a:solidFill>
-              <a:srgbClr val="B3B3B3"/>
-            </a:solidFill>
-            <a:prstDash val="dash"/>
-          </a:ln>
-        </p:spPr>
-      </p:sp>
-      <p:sp>
-        <p:nvSpPr>
-          <p:cNvPr id="16" name="Text 14"/>
-          <p:cNvSpPr/>
-          <p:nvPr/>
-        </p:nvSpPr>
-        <p:spPr>
-          <a:xfrm>
-            <a:off x="489204" y="1623060"/>
-            <a:ext cx="237744" cy="237744"/>
-          </a:xfrm>
-          <a:prstGeom prst="rect">
-            <a:avLst/>
-          </a:prstGeom>
-          <a:noFill/>
-          <a:ln/>
-        </p:spPr>
-        <p:txBody>
-          <a:bodyPr wrap="square" lIns="0" tIns="0" rIns="0" bIns="0" rtlCol="0" anchor="ctr"/>
-          <a:lstStyle/>
-          <a:p>
-            <a:pPr algn="ctr" indent="0" marL="0">
-              <a:buNone/>
-            </a:pPr>
-            <a:r>
-              <a:rPr lang="en-US" sz="450" dirty="0">
-                <a:solidFill>
-                  <a:srgbClr val="8A8886"/>
-                </a:solidFill>
-                <a:latin typeface="Segoe UI" pitchFamily="34" charset="0"/>
-                <a:ea typeface="Segoe UI" pitchFamily="34" charset="-122"/>
-                <a:cs typeface="Segoe UI" pitchFamily="34" charset="-120"/>
-              </a:rPr>
-              <a:t>LOGO</a:t>
-            </a:r>
-            <a:endParaRPr lang="en-US" sz="450" dirty="0"/>
-          </a:p>
-        </p:txBody>
-      </p:sp>
-      <p:sp>
-        <p:nvSpPr>
-          <p:cNvPr id="17" name="Text 15"/>
+          <a:prstGeom prst="rect">
+            <a:avLst/>
+          </a:prstGeom>
+        </p:spPr>
+      </p:pic>
+      <p:sp>
+        <p:nvSpPr>
+          <p:cNvPr id="16" name="Text 13"/>
           <p:cNvSpPr/>
           <p:nvPr/>
         </p:nvSpPr>
@@ -1634,7 +1592,7 @@
       </p:sp>
       <p:sp>
         <p:nvSpPr>
-          <p:cNvPr id="18" name="Text 16"/>
+          <p:cNvPr id="17" name="Text 14"/>
           <p:cNvSpPr/>
           <p:nvPr/>
         </p:nvSpPr>
@@ -1696,7 +1654,7 @@
       </p:sp>
       <p:sp>
         <p:nvSpPr>
-          <p:cNvPr id="19" name="Shape 17"/>
+          <p:cNvPr id="18" name="Shape 15"/>
           <p:cNvSpPr/>
           <p:nvPr/>
         </p:nvSpPr>
@@ -1721,7 +1679,7 @@
       </p:sp>
       <p:sp>
         <p:nvSpPr>
-          <p:cNvPr id="20" name="Text 18"/>
+          <p:cNvPr id="19" name="Text 16"/>
           <p:cNvSpPr/>
           <p:nvPr/>
         </p:nvSpPr>
@@ -1760,7 +1718,7 @@
       </p:sp>
       <p:sp>
         <p:nvSpPr>
-          <p:cNvPr id="21" name="Shape 19"/>
+          <p:cNvPr id="20" name="Shape 17"/>
           <p:cNvSpPr/>
           <p:nvPr/>
         </p:nvSpPr>
@@ -1792,75 +1750,33 @@
           </a:effectLst>
         </p:spPr>
       </p:sp>
-      <p:sp>
-        <p:nvSpPr>
-          <p:cNvPr id="22" name="Shape 20"/>
-          <p:cNvSpPr/>
-          <p:nvPr/>
-        </p:nvSpPr>
+      <p:pic>
+        <p:nvPicPr>
+          <p:cNvPr id="21" name="Image 1" descr="preencoded.png">    </p:cNvPr>
+          <p:cNvPicPr>
+            <a:picLocks noChangeAspect="1"/>
+          </p:cNvPicPr>
+          <p:nvPr/>
+        </p:nvPicPr>
+        <p:blipFill>
+          <a:blip r:embed="rId2"/>
+          <a:stretch>
+            <a:fillRect/>
+          </a:stretch>
+        </p:blipFill>
         <p:spPr>
           <a:xfrm>
             <a:off x="489204" y="2555748"/>
             <a:ext cx="237744" cy="237744"/>
           </a:xfrm>
-          <a:prstGeom prst="roundRect">
-            <a:avLst>
-              <a:gd name="adj" fmla="val 11538"/>
-            </a:avLst>
-          </a:prstGeom>
-          <a:solidFill>
-            <a:srgbClr val="F3F2F1"/>
-          </a:solidFill>
-          <a:ln w="9525">
-            <a:solidFill>
-              <a:srgbClr val="B3B3B3"/>
-            </a:solidFill>
-            <a:prstDash val="dash"/>
-          </a:ln>
-        </p:spPr>
-      </p:sp>
-      <p:sp>
-        <p:nvSpPr>
-          <p:cNvPr id="23" name="Text 21"/>
-          <p:cNvSpPr/>
-          <p:nvPr/>
-        </p:nvSpPr>
-        <p:spPr>
-          <a:xfrm>
-            <a:off x="489204" y="2555748"/>
-            <a:ext cx="237744" cy="237744"/>
-          </a:xfrm>
-          <a:prstGeom prst="rect">
-            <a:avLst/>
-          </a:prstGeom>
-          <a:noFill/>
-          <a:ln/>
-        </p:spPr>
-        <p:txBody>
-          <a:bodyPr wrap="square" lIns="0" tIns="0" rIns="0" bIns="0" rtlCol="0" anchor="ctr"/>
-          <a:lstStyle/>
-          <a:p>
-            <a:pPr algn="ctr" indent="0" marL="0">
-              <a:buNone/>
-            </a:pPr>
-            <a:r>
-              <a:rPr lang="en-US" sz="450" dirty="0">
-                <a:solidFill>
-                  <a:srgbClr val="8A8886"/>
-                </a:solidFill>
-                <a:latin typeface="Segoe UI" pitchFamily="34" charset="0"/>
-                <a:ea typeface="Segoe UI" pitchFamily="34" charset="-122"/>
-                <a:cs typeface="Segoe UI" pitchFamily="34" charset="-120"/>
-              </a:rPr>
-              <a:t>LOGO</a:t>
-            </a:r>
-            <a:endParaRPr lang="en-US" sz="450" dirty="0"/>
-          </a:p>
-        </p:txBody>
-      </p:sp>
-      <p:sp>
-        <p:nvSpPr>
-          <p:cNvPr id="24" name="Text 22"/>
+          <a:prstGeom prst="rect">
+            <a:avLst/>
+          </a:prstGeom>
+        </p:spPr>
+      </p:pic>
+      <p:sp>
+        <p:nvSpPr>
+          <p:cNvPr id="22" name="Text 18"/>
           <p:cNvSpPr/>
           <p:nvPr/>
         </p:nvSpPr>
@@ -1902,7 +1818,7 @@
       </p:sp>
       <p:sp>
         <p:nvSpPr>
-          <p:cNvPr id="25" name="Text 23"/>
+          <p:cNvPr id="23" name="Text 19"/>
           <p:cNvSpPr/>
           <p:nvPr/>
         </p:nvSpPr>
@@ -1944,7 +1860,7 @@
       </p:sp>
       <p:sp>
         <p:nvSpPr>
-          <p:cNvPr id="26" name="Shape 24"/>
+          <p:cNvPr id="24" name="Shape 20"/>
           <p:cNvSpPr/>
           <p:nvPr/>
         </p:nvSpPr>
@@ -1976,75 +1892,33 @@
           </a:effectLst>
         </p:spPr>
       </p:sp>
-      <p:sp>
-        <p:nvSpPr>
-          <p:cNvPr id="27" name="Shape 25"/>
-          <p:cNvSpPr/>
-          <p:nvPr/>
-        </p:nvSpPr>
+      <p:pic>
+        <p:nvPicPr>
+          <p:cNvPr id="25" name="Image 2" descr="preencoded.png">    </p:cNvPr>
+          <p:cNvPicPr>
+            <a:picLocks noChangeAspect="1"/>
+          </p:cNvPicPr>
+          <p:nvPr/>
+        </p:nvPicPr>
+        <p:blipFill>
+          <a:blip r:embed="rId3"/>
+          <a:stretch>
+            <a:fillRect/>
+          </a:stretch>
+        </p:blipFill>
         <p:spPr>
           <a:xfrm>
             <a:off x="2418588" y="1623060"/>
             <a:ext cx="237744" cy="237744"/>
           </a:xfrm>
-          <a:prstGeom prst="roundRect">
-            <a:avLst>
-              <a:gd name="adj" fmla="val 11538"/>
-            </a:avLst>
-          </a:prstGeom>
-          <a:solidFill>
-            <a:srgbClr val="F3F2F1"/>
-          </a:solidFill>
-          <a:ln w="9525">
-            <a:solidFill>
-              <a:srgbClr val="B3B3B3"/>
-            </a:solidFill>
-            <a:prstDash val="dash"/>
-          </a:ln>
-        </p:spPr>
-      </p:sp>
-      <p:sp>
-        <p:nvSpPr>
-          <p:cNvPr id="28" name="Text 26"/>
-          <p:cNvSpPr/>
-          <p:nvPr/>
-        </p:nvSpPr>
-        <p:spPr>
-          <a:xfrm>
-            <a:off x="2418588" y="1623060"/>
-            <a:ext cx="237744" cy="237744"/>
-          </a:xfrm>
-          <a:prstGeom prst="rect">
-            <a:avLst/>
-          </a:prstGeom>
-          <a:noFill/>
-          <a:ln/>
-        </p:spPr>
-        <p:txBody>
-          <a:bodyPr wrap="square" lIns="0" tIns="0" rIns="0" bIns="0" rtlCol="0" anchor="ctr"/>
-          <a:lstStyle/>
-          <a:p>
-            <a:pPr algn="ctr" indent="0" marL="0">
-              <a:buNone/>
-            </a:pPr>
-            <a:r>
-              <a:rPr lang="en-US" sz="450" dirty="0">
-                <a:solidFill>
-                  <a:srgbClr val="8A8886"/>
-                </a:solidFill>
-                <a:latin typeface="Segoe UI" pitchFamily="34" charset="0"/>
-                <a:ea typeface="Segoe UI" pitchFamily="34" charset="-122"/>
-                <a:cs typeface="Segoe UI" pitchFamily="34" charset="-120"/>
-              </a:rPr>
-              <a:t>LOGO</a:t>
-            </a:r>
-            <a:endParaRPr lang="en-US" sz="450" dirty="0"/>
-          </a:p>
-        </p:txBody>
-      </p:sp>
-      <p:sp>
-        <p:nvSpPr>
-          <p:cNvPr id="29" name="Text 27"/>
+          <a:prstGeom prst="rect">
+            <a:avLst/>
+          </a:prstGeom>
+        </p:spPr>
+      </p:pic>
+      <p:sp>
+        <p:nvSpPr>
+          <p:cNvPr id="26" name="Text 21"/>
           <p:cNvSpPr/>
           <p:nvPr/>
         </p:nvSpPr>
@@ -2086,7 +1960,7 @@
       </p:sp>
       <p:sp>
         <p:nvSpPr>
-          <p:cNvPr id="30" name="Text 28"/>
+          <p:cNvPr id="27" name="Text 22"/>
           <p:cNvSpPr/>
           <p:nvPr/>
         </p:nvSpPr>
@@ -2148,7 +2022,7 @@
       </p:sp>
       <p:sp>
         <p:nvSpPr>
-          <p:cNvPr id="31" name="Shape 29"/>
+          <p:cNvPr id="28" name="Shape 23"/>
           <p:cNvSpPr/>
           <p:nvPr/>
         </p:nvSpPr>
@@ -2173,7 +2047,7 @@
       </p:sp>
       <p:sp>
         <p:nvSpPr>
-          <p:cNvPr id="32" name="Text 30"/>
+          <p:cNvPr id="29" name="Text 24"/>
           <p:cNvSpPr/>
           <p:nvPr/>
         </p:nvSpPr>
@@ -2212,7 +2086,7 @@
       </p:sp>
       <p:sp>
         <p:nvSpPr>
-          <p:cNvPr id="33" name="Shape 31"/>
+          <p:cNvPr id="30" name="Shape 25"/>
           <p:cNvSpPr/>
           <p:nvPr/>
         </p:nvSpPr>
@@ -2244,75 +2118,33 @@
           </a:effectLst>
         </p:spPr>
       </p:sp>
-      <p:sp>
-        <p:nvSpPr>
-          <p:cNvPr id="34" name="Shape 32"/>
-          <p:cNvSpPr/>
-          <p:nvPr/>
-        </p:nvSpPr>
+      <p:pic>
+        <p:nvPicPr>
+          <p:cNvPr id="31" name="Image 3" descr="preencoded.png">    </p:cNvPr>
+          <p:cNvPicPr>
+            <a:picLocks noChangeAspect="1"/>
+          </p:cNvPicPr>
+          <p:nvPr/>
+        </p:nvPicPr>
+        <p:blipFill>
+          <a:blip r:embed="rId4"/>
+          <a:stretch>
+            <a:fillRect/>
+          </a:stretch>
+        </p:blipFill>
         <p:spPr>
           <a:xfrm>
             <a:off x="4370832" y="1623060"/>
             <a:ext cx="237744" cy="237744"/>
           </a:xfrm>
-          <a:prstGeom prst="roundRect">
-            <a:avLst>
-              <a:gd name="adj" fmla="val 11538"/>
-            </a:avLst>
-          </a:prstGeom>
-          <a:solidFill>
-            <a:srgbClr val="F3F2F1"/>
-          </a:solidFill>
-          <a:ln w="9525">
-            <a:solidFill>
-              <a:srgbClr val="B3B3B3"/>
-            </a:solidFill>
-            <a:prstDash val="dash"/>
-          </a:ln>
-        </p:spPr>
-      </p:sp>
-      <p:sp>
-        <p:nvSpPr>
-          <p:cNvPr id="35" name="Text 33"/>
-          <p:cNvSpPr/>
-          <p:nvPr/>
-        </p:nvSpPr>
-        <p:spPr>
-          <a:xfrm>
-            <a:off x="4370832" y="1623060"/>
-            <a:ext cx="237744" cy="237744"/>
-          </a:xfrm>
-          <a:prstGeom prst="rect">
-            <a:avLst/>
-          </a:prstGeom>
-          <a:noFill/>
-          <a:ln/>
-        </p:spPr>
-        <p:txBody>
-          <a:bodyPr wrap="square" lIns="0" tIns="0" rIns="0" bIns="0" rtlCol="0" anchor="ctr"/>
-          <a:lstStyle/>
-          <a:p>
-            <a:pPr algn="ctr" indent="0" marL="0">
-              <a:buNone/>
-            </a:pPr>
-            <a:r>
-              <a:rPr lang="en-US" sz="450" dirty="0">
-                <a:solidFill>
-                  <a:srgbClr val="8A8886"/>
-                </a:solidFill>
-                <a:latin typeface="Segoe UI" pitchFamily="34" charset="0"/>
-                <a:ea typeface="Segoe UI" pitchFamily="34" charset="-122"/>
-                <a:cs typeface="Segoe UI" pitchFamily="34" charset="-120"/>
-              </a:rPr>
-              <a:t>LOGO</a:t>
-            </a:r>
-            <a:endParaRPr lang="en-US" sz="450" dirty="0"/>
-          </a:p>
-        </p:txBody>
-      </p:sp>
-      <p:sp>
-        <p:nvSpPr>
-          <p:cNvPr id="36" name="Text 34"/>
+          <a:prstGeom prst="rect">
+            <a:avLst/>
+          </a:prstGeom>
+        </p:spPr>
+      </p:pic>
+      <p:sp>
+        <p:nvSpPr>
+          <p:cNvPr id="32" name="Text 26"/>
           <p:cNvSpPr/>
           <p:nvPr/>
         </p:nvSpPr>
@@ -2354,7 +2186,7 @@
       </p:sp>
       <p:sp>
         <p:nvSpPr>
-          <p:cNvPr id="37" name="Text 35"/>
+          <p:cNvPr id="33" name="Text 27"/>
           <p:cNvSpPr/>
           <p:nvPr/>
         </p:nvSpPr>
@@ -2416,7 +2248,7 @@
       </p:sp>
       <p:sp>
         <p:nvSpPr>
-          <p:cNvPr id="38" name="Shape 36"/>
+          <p:cNvPr id="34" name="Shape 28"/>
           <p:cNvSpPr/>
           <p:nvPr/>
         </p:nvSpPr>
@@ -2441,7 +2273,7 @@
       </p:sp>
       <p:sp>
         <p:nvSpPr>
-          <p:cNvPr id="39" name="Text 37"/>
+          <p:cNvPr id="35" name="Text 29"/>
           <p:cNvSpPr/>
           <p:nvPr/>
         </p:nvSpPr>
@@ -2480,7 +2312,7 @@
       </p:sp>
       <p:sp>
         <p:nvSpPr>
-          <p:cNvPr id="40" name="Shape 38"/>
+          <p:cNvPr id="36" name="Shape 30"/>
           <p:cNvSpPr/>
           <p:nvPr/>
         </p:nvSpPr>
@@ -2512,75 +2344,33 @@
           </a:effectLst>
         </p:spPr>
       </p:sp>
-      <p:sp>
-        <p:nvSpPr>
-          <p:cNvPr id="41" name="Shape 39"/>
-          <p:cNvSpPr/>
-          <p:nvPr/>
-        </p:nvSpPr>
+      <p:pic>
+        <p:nvPicPr>
+          <p:cNvPr id="37" name="Image 4" descr="preencoded.png">    </p:cNvPr>
+          <p:cNvPicPr>
+            <a:picLocks noChangeAspect="1"/>
+          </p:cNvPicPr>
+          <p:nvPr/>
+        </p:nvPicPr>
+        <p:blipFill>
+          <a:blip r:embed="rId5"/>
+          <a:stretch>
+            <a:fillRect/>
+          </a:stretch>
+        </p:blipFill>
         <p:spPr>
           <a:xfrm>
             <a:off x="6323076" y="1623060"/>
             <a:ext cx="237744" cy="237744"/>
           </a:xfrm>
-          <a:prstGeom prst="roundRect">
-            <a:avLst>
-              <a:gd name="adj" fmla="val 11538"/>
-            </a:avLst>
-          </a:prstGeom>
-          <a:solidFill>
-            <a:srgbClr val="F3F2F1"/>
-          </a:solidFill>
-          <a:ln w="9525">
-            <a:solidFill>
-              <a:srgbClr val="B3B3B3"/>
-            </a:solidFill>
-            <a:prstDash val="dash"/>
-          </a:ln>
-        </p:spPr>
-      </p:sp>
-      <p:sp>
-        <p:nvSpPr>
-          <p:cNvPr id="42" name="Text 40"/>
-          <p:cNvSpPr/>
-          <p:nvPr/>
-        </p:nvSpPr>
-        <p:spPr>
-          <a:xfrm>
-            <a:off x="6323076" y="1623060"/>
-            <a:ext cx="237744" cy="237744"/>
-          </a:xfrm>
-          <a:prstGeom prst="rect">
-            <a:avLst/>
-          </a:prstGeom>
-          <a:noFill/>
-          <a:ln/>
-        </p:spPr>
-        <p:txBody>
-          <a:bodyPr wrap="square" lIns="0" tIns="0" rIns="0" bIns="0" rtlCol="0" anchor="ctr"/>
-          <a:lstStyle/>
-          <a:p>
-            <a:pPr algn="ctr" indent="0" marL="0">
-              <a:buNone/>
-            </a:pPr>
-            <a:r>
-              <a:rPr lang="en-US" sz="450" dirty="0">
-                <a:solidFill>
-                  <a:srgbClr val="8A8886"/>
-                </a:solidFill>
-                <a:latin typeface="Segoe UI" pitchFamily="34" charset="0"/>
-                <a:ea typeface="Segoe UI" pitchFamily="34" charset="-122"/>
-                <a:cs typeface="Segoe UI" pitchFamily="34" charset="-120"/>
-              </a:rPr>
-              <a:t>LOGO</a:t>
-            </a:r>
-            <a:endParaRPr lang="en-US" sz="450" dirty="0"/>
-          </a:p>
-        </p:txBody>
-      </p:sp>
-      <p:sp>
-        <p:nvSpPr>
-          <p:cNvPr id="43" name="Text 41"/>
+          <a:prstGeom prst="rect">
+            <a:avLst/>
+          </a:prstGeom>
+        </p:spPr>
+      </p:pic>
+      <p:sp>
+        <p:nvSpPr>
+          <p:cNvPr id="38" name="Text 31"/>
           <p:cNvSpPr/>
           <p:nvPr/>
         </p:nvSpPr>
@@ -2622,7 +2412,7 @@
       </p:sp>
       <p:sp>
         <p:nvSpPr>
-          <p:cNvPr id="44" name="Text 42"/>
+          <p:cNvPr id="39" name="Text 32"/>
           <p:cNvSpPr/>
           <p:nvPr/>
         </p:nvSpPr>
@@ -2684,7 +2474,7 @@
       </p:sp>
       <p:sp>
         <p:nvSpPr>
-          <p:cNvPr id="45" name="Shape 43"/>
+          <p:cNvPr id="40" name="Shape 33"/>
           <p:cNvSpPr/>
           <p:nvPr/>
         </p:nvSpPr>
@@ -2709,7 +2499,7 @@
       </p:sp>
       <p:sp>
         <p:nvSpPr>
-          <p:cNvPr id="46" name="Text 44"/>
+          <p:cNvPr id="41" name="Text 34"/>
           <p:cNvSpPr/>
           <p:nvPr/>
         </p:nvSpPr>
@@ -2748,7 +2538,7 @@
       </p:sp>
       <p:sp>
         <p:nvSpPr>
-          <p:cNvPr id="47" name="Shape 45"/>
+          <p:cNvPr id="42" name="Shape 35"/>
           <p:cNvSpPr/>
           <p:nvPr/>
         </p:nvSpPr>
@@ -2780,75 +2570,33 @@
           </a:effectLst>
         </p:spPr>
       </p:sp>
-      <p:sp>
-        <p:nvSpPr>
-          <p:cNvPr id="48" name="Shape 46"/>
-          <p:cNvSpPr/>
-          <p:nvPr/>
-        </p:nvSpPr>
+      <p:pic>
+        <p:nvPicPr>
+          <p:cNvPr id="43" name="Image 5" descr="preencoded.png">    </p:cNvPr>
+          <p:cNvPicPr>
+            <a:picLocks noChangeAspect="1"/>
+          </p:cNvPicPr>
+          <p:nvPr/>
+        </p:nvPicPr>
+        <p:blipFill>
+          <a:blip r:embed="rId6"/>
+          <a:stretch>
+            <a:fillRect/>
+          </a:stretch>
+        </p:blipFill>
         <p:spPr>
           <a:xfrm>
             <a:off x="8275320" y="1623060"/>
             <a:ext cx="237744" cy="237744"/>
           </a:xfrm>
-          <a:prstGeom prst="roundRect">
-            <a:avLst>
-              <a:gd name="adj" fmla="val 11538"/>
-            </a:avLst>
-          </a:prstGeom>
-          <a:solidFill>
-            <a:srgbClr val="F3F2F1"/>
-          </a:solidFill>
-          <a:ln w="9525">
-            <a:solidFill>
-              <a:srgbClr val="B3B3B3"/>
-            </a:solidFill>
-            <a:prstDash val="dash"/>
-          </a:ln>
-        </p:spPr>
-      </p:sp>
-      <p:sp>
-        <p:nvSpPr>
-          <p:cNvPr id="49" name="Text 47"/>
-          <p:cNvSpPr/>
-          <p:nvPr/>
-        </p:nvSpPr>
-        <p:spPr>
-          <a:xfrm>
-            <a:off x="8275320" y="1623060"/>
-            <a:ext cx="237744" cy="237744"/>
-          </a:xfrm>
-          <a:prstGeom prst="rect">
-            <a:avLst/>
-          </a:prstGeom>
-          <a:noFill/>
-          <a:ln/>
-        </p:spPr>
-        <p:txBody>
-          <a:bodyPr wrap="square" lIns="0" tIns="0" rIns="0" bIns="0" rtlCol="0" anchor="ctr"/>
-          <a:lstStyle/>
-          <a:p>
-            <a:pPr algn="ctr" indent="0" marL="0">
-              <a:buNone/>
-            </a:pPr>
-            <a:r>
-              <a:rPr lang="en-US" sz="450" dirty="0">
-                <a:solidFill>
-                  <a:srgbClr val="8A8886"/>
-                </a:solidFill>
-                <a:latin typeface="Segoe UI" pitchFamily="34" charset="0"/>
-                <a:ea typeface="Segoe UI" pitchFamily="34" charset="-122"/>
-                <a:cs typeface="Segoe UI" pitchFamily="34" charset="-120"/>
-              </a:rPr>
-              <a:t>LOGO</a:t>
-            </a:r>
-            <a:endParaRPr lang="en-US" sz="450" dirty="0"/>
-          </a:p>
-        </p:txBody>
-      </p:sp>
-      <p:sp>
-        <p:nvSpPr>
-          <p:cNvPr id="50" name="Text 48"/>
+          <a:prstGeom prst="rect">
+            <a:avLst/>
+          </a:prstGeom>
+        </p:spPr>
+      </p:pic>
+      <p:sp>
+        <p:nvSpPr>
+          <p:cNvPr id="44" name="Text 36"/>
           <p:cNvSpPr/>
           <p:nvPr/>
         </p:nvSpPr>
@@ -2890,7 +2638,7 @@
       </p:sp>
       <p:sp>
         <p:nvSpPr>
-          <p:cNvPr id="51" name="Text 49"/>
+          <p:cNvPr id="45" name="Text 37"/>
           <p:cNvSpPr/>
           <p:nvPr/>
         </p:nvSpPr>
@@ -2952,7 +2700,7 @@
       </p:sp>
       <p:sp>
         <p:nvSpPr>
-          <p:cNvPr id="52" name="Shape 50"/>
+          <p:cNvPr id="46" name="Shape 38"/>
           <p:cNvSpPr/>
           <p:nvPr/>
         </p:nvSpPr>
@@ -2977,7 +2725,7 @@
       </p:sp>
       <p:sp>
         <p:nvSpPr>
-          <p:cNvPr id="53" name="Text 51"/>
+          <p:cNvPr id="47" name="Text 39"/>
           <p:cNvSpPr/>
           <p:nvPr/>
         </p:nvSpPr>
@@ -3016,7 +2764,7 @@
       </p:sp>
       <p:sp>
         <p:nvSpPr>
-          <p:cNvPr id="54" name="Shape 52"/>
+          <p:cNvPr id="48" name="Shape 40"/>
           <p:cNvSpPr/>
           <p:nvPr/>
         </p:nvSpPr>
@@ -3048,75 +2796,33 @@
           </a:effectLst>
         </p:spPr>
       </p:sp>
-      <p:sp>
-        <p:nvSpPr>
-          <p:cNvPr id="55" name="Shape 53"/>
-          <p:cNvSpPr/>
-          <p:nvPr/>
-        </p:nvSpPr>
+      <p:pic>
+        <p:nvPicPr>
+          <p:cNvPr id="49" name="Image 6" descr="preencoded.png">    </p:cNvPr>
+          <p:cNvPicPr>
+            <a:picLocks noChangeAspect="1"/>
+          </p:cNvPicPr>
+          <p:nvPr/>
+        </p:nvPicPr>
+        <p:blipFill>
+          <a:blip r:embed="rId7"/>
+          <a:stretch>
+            <a:fillRect/>
+          </a:stretch>
+        </p:blipFill>
         <p:spPr>
           <a:xfrm>
             <a:off x="10245852" y="1623060"/>
             <a:ext cx="237744" cy="237744"/>
           </a:xfrm>
-          <a:prstGeom prst="roundRect">
-            <a:avLst>
-              <a:gd name="adj" fmla="val 11538"/>
-            </a:avLst>
-          </a:prstGeom>
-          <a:solidFill>
-            <a:srgbClr val="F3F2F1"/>
-          </a:solidFill>
-          <a:ln w="9525">
-            <a:solidFill>
-              <a:srgbClr val="B3B3B3"/>
-            </a:solidFill>
-            <a:prstDash val="dash"/>
-          </a:ln>
-        </p:spPr>
-      </p:sp>
-      <p:sp>
-        <p:nvSpPr>
-          <p:cNvPr id="56" name="Text 54"/>
-          <p:cNvSpPr/>
-          <p:nvPr/>
-        </p:nvSpPr>
-        <p:spPr>
-          <a:xfrm>
-            <a:off x="10245852" y="1623060"/>
-            <a:ext cx="237744" cy="237744"/>
-          </a:xfrm>
-          <a:prstGeom prst="rect">
-            <a:avLst/>
-          </a:prstGeom>
-          <a:noFill/>
-          <a:ln/>
-        </p:spPr>
-        <p:txBody>
-          <a:bodyPr wrap="square" lIns="0" tIns="0" rIns="0" bIns="0" rtlCol="0" anchor="ctr"/>
-          <a:lstStyle/>
-          <a:p>
-            <a:pPr algn="ctr" indent="0" marL="0">
-              <a:buNone/>
-            </a:pPr>
-            <a:r>
-              <a:rPr lang="en-US" sz="450" dirty="0">
-                <a:solidFill>
-                  <a:srgbClr val="8A8886"/>
-                </a:solidFill>
-                <a:latin typeface="Segoe UI" pitchFamily="34" charset="0"/>
-                <a:ea typeface="Segoe UI" pitchFamily="34" charset="-122"/>
-                <a:cs typeface="Segoe UI" pitchFamily="34" charset="-120"/>
-              </a:rPr>
-              <a:t>LOGO</a:t>
-            </a:r>
-            <a:endParaRPr lang="en-US" sz="450" dirty="0"/>
-          </a:p>
-        </p:txBody>
-      </p:sp>
-      <p:sp>
-        <p:nvSpPr>
-          <p:cNvPr id="57" name="Text 55"/>
+          <a:prstGeom prst="rect">
+            <a:avLst/>
+          </a:prstGeom>
+        </p:spPr>
+      </p:pic>
+      <p:sp>
+        <p:nvSpPr>
+          <p:cNvPr id="50" name="Text 41"/>
           <p:cNvSpPr/>
           <p:nvPr/>
         </p:nvSpPr>
@@ -3158,7 +2864,7 @@
       </p:sp>
       <p:sp>
         <p:nvSpPr>
-          <p:cNvPr id="58" name="Text 56"/>
+          <p:cNvPr id="51" name="Text 42"/>
           <p:cNvSpPr/>
           <p:nvPr/>
         </p:nvSpPr>
@@ -3220,7 +2926,7 @@
       </p:sp>
       <p:sp>
         <p:nvSpPr>
-          <p:cNvPr id="59" name="Shape 57"/>
+          <p:cNvPr id="52" name="Shape 43"/>
           <p:cNvSpPr/>
           <p:nvPr/>
         </p:nvSpPr>
@@ -3245,7 +2951,7 @@
       </p:sp>
       <p:sp>
         <p:nvSpPr>
-          <p:cNvPr id="60" name="Text 58"/>
+          <p:cNvPr id="53" name="Text 44"/>
           <p:cNvSpPr/>
           <p:nvPr/>
         </p:nvSpPr>
@@ -3284,7 +2990,7 @@
       </p:sp>
       <p:sp>
         <p:nvSpPr>
-          <p:cNvPr id="61" name="Shape 59"/>
+          <p:cNvPr id="54" name="Shape 45"/>
           <p:cNvSpPr/>
           <p:nvPr/>
         </p:nvSpPr>
@@ -3316,75 +3022,33 @@
           </a:effectLst>
         </p:spPr>
       </p:sp>
-      <p:sp>
-        <p:nvSpPr>
-          <p:cNvPr id="62" name="Shape 60"/>
-          <p:cNvSpPr/>
-          <p:nvPr/>
-        </p:nvSpPr>
+      <p:pic>
+        <p:nvPicPr>
+          <p:cNvPr id="55" name="Image 7" descr="preencoded.png">    </p:cNvPr>
+          <p:cNvPicPr>
+            <a:picLocks noChangeAspect="1"/>
+          </p:cNvPicPr>
+          <p:nvPr/>
+        </p:nvPicPr>
+        <p:blipFill>
+          <a:blip r:embed="rId8"/>
+          <a:stretch>
+            <a:fillRect/>
+          </a:stretch>
+        </p:blipFill>
         <p:spPr>
           <a:xfrm>
             <a:off x="10245852" y="2903220"/>
             <a:ext cx="237744" cy="237744"/>
           </a:xfrm>
-          <a:prstGeom prst="roundRect">
-            <a:avLst>
-              <a:gd name="adj" fmla="val 11538"/>
-            </a:avLst>
-          </a:prstGeom>
-          <a:solidFill>
-            <a:srgbClr val="F3F2F1"/>
-          </a:solidFill>
-          <a:ln w="9525">
-            <a:solidFill>
-              <a:srgbClr val="B3B3B3"/>
-            </a:solidFill>
-            <a:prstDash val="dash"/>
-          </a:ln>
-        </p:spPr>
-      </p:sp>
-      <p:sp>
-        <p:nvSpPr>
-          <p:cNvPr id="63" name="Text 61"/>
-          <p:cNvSpPr/>
-          <p:nvPr/>
-        </p:nvSpPr>
-        <p:spPr>
-          <a:xfrm>
-            <a:off x="10245852" y="2903220"/>
-            <a:ext cx="237744" cy="237744"/>
-          </a:xfrm>
-          <a:prstGeom prst="rect">
-            <a:avLst/>
-          </a:prstGeom>
-          <a:noFill/>
-          <a:ln/>
-        </p:spPr>
-        <p:txBody>
-          <a:bodyPr wrap="square" lIns="0" tIns="0" rIns="0" bIns="0" rtlCol="0" anchor="ctr"/>
-          <a:lstStyle/>
-          <a:p>
-            <a:pPr algn="ctr" indent="0" marL="0">
-              <a:buNone/>
-            </a:pPr>
-            <a:r>
-              <a:rPr lang="en-US" sz="450" dirty="0">
-                <a:solidFill>
-                  <a:srgbClr val="8A8886"/>
-                </a:solidFill>
-                <a:latin typeface="Segoe UI" pitchFamily="34" charset="0"/>
-                <a:ea typeface="Segoe UI" pitchFamily="34" charset="-122"/>
-                <a:cs typeface="Segoe UI" pitchFamily="34" charset="-120"/>
-              </a:rPr>
-              <a:t>LOGO</a:t>
-            </a:r>
-            <a:endParaRPr lang="en-US" sz="450" dirty="0"/>
-          </a:p>
-        </p:txBody>
-      </p:sp>
-      <p:sp>
-        <p:nvSpPr>
-          <p:cNvPr id="64" name="Text 62"/>
+          <a:prstGeom prst="rect">
+            <a:avLst/>
+          </a:prstGeom>
+        </p:spPr>
+      </p:pic>
+      <p:sp>
+        <p:nvSpPr>
+          <p:cNvPr id="56" name="Text 46"/>
           <p:cNvSpPr/>
           <p:nvPr/>
         </p:nvSpPr>
@@ -3426,7 +3090,7 @@
       </p:sp>
       <p:sp>
         <p:nvSpPr>
-          <p:cNvPr id="65" name="Text 63"/>
+          <p:cNvPr id="57" name="Text 47"/>
           <p:cNvSpPr/>
           <p:nvPr/>
         </p:nvSpPr>
@@ -3468,7 +3132,7 @@
       </p:sp>
       <p:sp>
         <p:nvSpPr>
-          <p:cNvPr id="66" name="Shape 64"/>
+          <p:cNvPr id="58" name="Shape 48"/>
           <p:cNvSpPr/>
           <p:nvPr/>
         </p:nvSpPr>
@@ -3493,7 +3157,7 @@
       </p:sp>
       <p:sp>
         <p:nvSpPr>
-          <p:cNvPr id="67" name="Text 65"/>
+          <p:cNvPr id="59" name="Text 49"/>
           <p:cNvSpPr/>
           <p:nvPr/>
         </p:nvSpPr>
@@ -3532,7 +3196,7 @@
       </p:sp>
       <p:sp>
         <p:nvSpPr>
-          <p:cNvPr id="68" name="Shape 66"/>
+          <p:cNvPr id="60" name="Shape 50"/>
           <p:cNvSpPr/>
           <p:nvPr/>
         </p:nvSpPr>
@@ -3556,7 +3220,7 @@
       </p:sp>
       <p:sp>
         <p:nvSpPr>
-          <p:cNvPr id="69" name="Shape 67"/>
+          <p:cNvPr id="61" name="Shape 51"/>
           <p:cNvSpPr/>
           <p:nvPr/>
         </p:nvSpPr>
@@ -3580,7 +3244,7 @@
       </p:sp>
       <p:sp>
         <p:nvSpPr>
-          <p:cNvPr id="70" name="Shape 68"/>
+          <p:cNvPr id="62" name="Shape 52"/>
           <p:cNvSpPr/>
           <p:nvPr/>
         </p:nvSpPr>
@@ -3604,7 +3268,7 @@
       </p:sp>
       <p:sp>
         <p:nvSpPr>
-          <p:cNvPr id="71" name="Shape 69"/>
+          <p:cNvPr id="63" name="Shape 53"/>
           <p:cNvSpPr/>
           <p:nvPr/>
         </p:nvSpPr>
@@ -3628,7 +3292,7 @@
       </p:sp>
       <p:sp>
         <p:nvSpPr>
-          <p:cNvPr id="72" name="Shape 70"/>
+          <p:cNvPr id="64" name="Shape 54"/>
           <p:cNvSpPr/>
           <p:nvPr/>
         </p:nvSpPr>
@@ -3652,7 +3316,7 @@
       </p:sp>
       <p:sp>
         <p:nvSpPr>
-          <p:cNvPr id="73" name="Shape 71"/>
+          <p:cNvPr id="65" name="Shape 55"/>
           <p:cNvSpPr/>
           <p:nvPr/>
         </p:nvSpPr>
@@ -3676,7 +3340,7 @@
       </p:sp>
       <p:sp>
         <p:nvSpPr>
-          <p:cNvPr id="74" name="Shape 72"/>
+          <p:cNvPr id="66" name="Shape 56"/>
           <p:cNvSpPr/>
           <p:nvPr/>
         </p:nvSpPr>
@@ -3700,7 +3364,7 @@
       </p:sp>
       <p:sp>
         <p:nvSpPr>
-          <p:cNvPr id="75" name="Shape 73"/>
+          <p:cNvPr id="67" name="Shape 57"/>
           <p:cNvSpPr/>
           <p:nvPr/>
         </p:nvSpPr>
@@ -3725,7 +3389,7 @@
       </p:sp>
       <p:sp>
         <p:nvSpPr>
-          <p:cNvPr id="76" name="Text 74"/>
+          <p:cNvPr id="68" name="Text 58"/>
           <p:cNvSpPr/>
           <p:nvPr/>
         </p:nvSpPr>
@@ -3764,7 +3428,7 @@
       </p:sp>
       <p:sp>
         <p:nvSpPr>
-          <p:cNvPr id="77" name="Shape 75"/>
+          <p:cNvPr id="69" name="Shape 59"/>
           <p:cNvSpPr/>
           <p:nvPr/>
         </p:nvSpPr>
@@ -3791,7 +3455,7 @@
       </p:sp>
       <p:sp>
         <p:nvSpPr>
-          <p:cNvPr id="78" name="Text 76"/>
+          <p:cNvPr id="70" name="Text 60"/>
           <p:cNvSpPr/>
           <p:nvPr/>
         </p:nvSpPr>
@@ -3846,7 +3510,7 @@
       </p:sp>
       <p:sp>
         <p:nvSpPr>
-          <p:cNvPr id="79" name="Shape 77"/>
+          <p:cNvPr id="71" name="Shape 61"/>
           <p:cNvSpPr/>
           <p:nvPr/>
         </p:nvSpPr>
@@ -3878,75 +3542,33 @@
           </a:effectLst>
         </p:spPr>
       </p:sp>
-      <p:sp>
-        <p:nvSpPr>
-          <p:cNvPr id="80" name="Shape 78"/>
-          <p:cNvSpPr/>
-          <p:nvPr/>
-        </p:nvSpPr>
+      <p:pic>
+        <p:nvPicPr>
+          <p:cNvPr id="72" name="Image 8" descr="preencoded.png">    </p:cNvPr>
+          <p:cNvPicPr>
+            <a:picLocks noChangeAspect="1"/>
+          </p:cNvPicPr>
+          <p:nvPr/>
+        </p:nvPicPr>
+        <p:blipFill>
+          <a:blip r:embed="rId9"/>
+          <a:stretch>
+            <a:fillRect/>
+          </a:stretch>
+        </p:blipFill>
         <p:spPr>
           <a:xfrm>
             <a:off x="2528316" y="3195828"/>
             <a:ext cx="219456" cy="219456"/>
           </a:xfrm>
-          <a:prstGeom prst="roundRect">
-            <a:avLst>
-              <a:gd name="adj" fmla="val 12500"/>
-            </a:avLst>
-          </a:prstGeom>
-          <a:solidFill>
-            <a:srgbClr val="F3F2F1"/>
-          </a:solidFill>
-          <a:ln w="9525">
-            <a:solidFill>
-              <a:srgbClr val="B3B3B3"/>
-            </a:solidFill>
-            <a:prstDash val="dash"/>
-          </a:ln>
-        </p:spPr>
-      </p:sp>
-      <p:sp>
-        <p:nvSpPr>
-          <p:cNvPr id="81" name="Text 79"/>
-          <p:cNvSpPr/>
-          <p:nvPr/>
-        </p:nvSpPr>
-        <p:spPr>
-          <a:xfrm>
-            <a:off x="2528316" y="3195828"/>
-            <a:ext cx="219456" cy="219456"/>
-          </a:xfrm>
-          <a:prstGeom prst="rect">
-            <a:avLst/>
-          </a:prstGeom>
-          <a:noFill/>
-          <a:ln/>
-        </p:spPr>
-        <p:txBody>
-          <a:bodyPr wrap="square" lIns="0" tIns="0" rIns="0" bIns="0" rtlCol="0" anchor="ctr"/>
-          <a:lstStyle/>
-          <a:p>
-            <a:pPr algn="ctr" indent="0" marL="0">
-              <a:buNone/>
-            </a:pPr>
-            <a:r>
-              <a:rPr lang="en-US" sz="450" dirty="0">
-                <a:solidFill>
-                  <a:srgbClr val="8A8886"/>
-                </a:solidFill>
-                <a:latin typeface="Segoe UI" pitchFamily="34" charset="0"/>
-                <a:ea typeface="Segoe UI" pitchFamily="34" charset="-122"/>
-                <a:cs typeface="Segoe UI" pitchFamily="34" charset="-120"/>
-              </a:rPr>
-              <a:t>LOGO</a:t>
-            </a:r>
-            <a:endParaRPr lang="en-US" sz="450" dirty="0"/>
-          </a:p>
-        </p:txBody>
-      </p:sp>
-      <p:sp>
-        <p:nvSpPr>
-          <p:cNvPr id="82" name="Text 80"/>
+          <a:prstGeom prst="rect">
+            <a:avLst/>
+          </a:prstGeom>
+        </p:spPr>
+      </p:pic>
+      <p:sp>
+        <p:nvSpPr>
+          <p:cNvPr id="73" name="Text 62"/>
           <p:cNvSpPr/>
           <p:nvPr/>
         </p:nvSpPr>
@@ -4008,7 +3630,7 @@
       </p:sp>
       <p:sp>
         <p:nvSpPr>
-          <p:cNvPr id="83" name="Text 81"/>
+          <p:cNvPr id="74" name="Text 63"/>
           <p:cNvSpPr/>
           <p:nvPr/>
         </p:nvSpPr>
@@ -4070,7 +3692,7 @@
       </p:sp>
       <p:sp>
         <p:nvSpPr>
-          <p:cNvPr id="84" name="Shape 82"/>
+          <p:cNvPr id="75" name="Shape 64"/>
           <p:cNvSpPr/>
           <p:nvPr/>
         </p:nvSpPr>
@@ -4095,7 +3717,7 @@
       </p:sp>
       <p:sp>
         <p:nvSpPr>
-          <p:cNvPr id="85" name="Text 83"/>
+          <p:cNvPr id="76" name="Text 65"/>
           <p:cNvSpPr/>
           <p:nvPr/>
         </p:nvSpPr>
@@ -4134,7 +3756,7 @@
       </p:sp>
       <p:sp>
         <p:nvSpPr>
-          <p:cNvPr id="86" name="Shape 84"/>
+          <p:cNvPr id="77" name="Shape 66"/>
           <p:cNvSpPr/>
           <p:nvPr/>
         </p:nvSpPr>
@@ -4166,75 +3788,33 @@
           </a:effectLst>
         </p:spPr>
       </p:sp>
-      <p:sp>
-        <p:nvSpPr>
-          <p:cNvPr id="87" name="Shape 85"/>
-          <p:cNvSpPr/>
-          <p:nvPr/>
-        </p:nvSpPr>
+      <p:pic>
+        <p:nvPicPr>
+          <p:cNvPr id="78" name="Image 9" descr="preencoded.png">    </p:cNvPr>
+          <p:cNvPicPr>
+            <a:picLocks noChangeAspect="1"/>
+          </p:cNvPicPr>
+          <p:nvPr/>
+        </p:nvPicPr>
+        <p:blipFill>
+          <a:blip r:embed="rId10"/>
+          <a:stretch>
+            <a:fillRect/>
+          </a:stretch>
+        </p:blipFill>
         <p:spPr>
           <a:xfrm>
             <a:off x="3895344" y="3195828"/>
             <a:ext cx="219456" cy="219456"/>
           </a:xfrm>
-          <a:prstGeom prst="roundRect">
-            <a:avLst>
-              <a:gd name="adj" fmla="val 12500"/>
-            </a:avLst>
-          </a:prstGeom>
-          <a:solidFill>
-            <a:srgbClr val="F3F2F1"/>
-          </a:solidFill>
-          <a:ln w="9525">
-            <a:solidFill>
-              <a:srgbClr val="B3B3B3"/>
-            </a:solidFill>
-            <a:prstDash val="dash"/>
-          </a:ln>
-        </p:spPr>
-      </p:sp>
-      <p:sp>
-        <p:nvSpPr>
-          <p:cNvPr id="88" name="Text 86"/>
-          <p:cNvSpPr/>
-          <p:nvPr/>
-        </p:nvSpPr>
-        <p:spPr>
-          <a:xfrm>
-            <a:off x="3895344" y="3195828"/>
-            <a:ext cx="219456" cy="219456"/>
-          </a:xfrm>
-          <a:prstGeom prst="rect">
-            <a:avLst/>
-          </a:prstGeom>
-          <a:noFill/>
-          <a:ln/>
-        </p:spPr>
-        <p:txBody>
-          <a:bodyPr wrap="square" lIns="0" tIns="0" rIns="0" bIns="0" rtlCol="0" anchor="ctr"/>
-          <a:lstStyle/>
-          <a:p>
-            <a:pPr algn="ctr" indent="0" marL="0">
-              <a:buNone/>
-            </a:pPr>
-            <a:r>
-              <a:rPr lang="en-US" sz="450" dirty="0">
-                <a:solidFill>
-                  <a:srgbClr val="8A8886"/>
-                </a:solidFill>
-                <a:latin typeface="Segoe UI" pitchFamily="34" charset="0"/>
-                <a:ea typeface="Segoe UI" pitchFamily="34" charset="-122"/>
-                <a:cs typeface="Segoe UI" pitchFamily="34" charset="-120"/>
-              </a:rPr>
-              <a:t>LOGO</a:t>
-            </a:r>
-            <a:endParaRPr lang="en-US" sz="450" dirty="0"/>
-          </a:p>
-        </p:txBody>
-      </p:sp>
-      <p:sp>
-        <p:nvSpPr>
-          <p:cNvPr id="89" name="Text 87"/>
+          <a:prstGeom prst="rect">
+            <a:avLst/>
+          </a:prstGeom>
+        </p:spPr>
+      </p:pic>
+      <p:sp>
+        <p:nvSpPr>
+          <p:cNvPr id="79" name="Text 67"/>
           <p:cNvSpPr/>
           <p:nvPr/>
         </p:nvSpPr>
@@ -4296,7 +3876,7 @@
       </p:sp>
       <p:sp>
         <p:nvSpPr>
-          <p:cNvPr id="90" name="Text 88"/>
+          <p:cNvPr id="80" name="Text 68"/>
           <p:cNvSpPr/>
           <p:nvPr/>
         </p:nvSpPr>
@@ -4358,7 +3938,7 @@
       </p:sp>
       <p:sp>
         <p:nvSpPr>
-          <p:cNvPr id="91" name="Shape 89"/>
+          <p:cNvPr id="81" name="Shape 69"/>
           <p:cNvSpPr/>
           <p:nvPr/>
         </p:nvSpPr>
@@ -4383,7 +3963,7 @@
       </p:sp>
       <p:sp>
         <p:nvSpPr>
-          <p:cNvPr id="92" name="Text 90"/>
+          <p:cNvPr id="82" name="Text 70"/>
           <p:cNvSpPr/>
           <p:nvPr/>
         </p:nvSpPr>
@@ -4422,7 +4002,7 @@
       </p:sp>
       <p:sp>
         <p:nvSpPr>
-          <p:cNvPr id="93" name="Shape 91"/>
+          <p:cNvPr id="83" name="Shape 71"/>
           <p:cNvSpPr/>
           <p:nvPr/>
         </p:nvSpPr>
@@ -4454,75 +4034,33 @@
           </a:effectLst>
         </p:spPr>
       </p:sp>
-      <p:sp>
-        <p:nvSpPr>
-          <p:cNvPr id="94" name="Shape 92"/>
-          <p:cNvSpPr/>
-          <p:nvPr/>
-        </p:nvSpPr>
+      <p:pic>
+        <p:nvPicPr>
+          <p:cNvPr id="84" name="Image 10" descr="preencoded.png">    </p:cNvPr>
+          <p:cNvPicPr>
+            <a:picLocks noChangeAspect="1"/>
+          </p:cNvPicPr>
+          <p:nvPr/>
+        </p:nvPicPr>
+        <p:blipFill>
+          <a:blip r:embed="rId11"/>
+          <a:stretch>
+            <a:fillRect/>
+          </a:stretch>
+        </p:blipFill>
         <p:spPr>
           <a:xfrm>
             <a:off x="5262372" y="3195828"/>
             <a:ext cx="219456" cy="219456"/>
           </a:xfrm>
-          <a:prstGeom prst="roundRect">
-            <a:avLst>
-              <a:gd name="adj" fmla="val 12500"/>
-            </a:avLst>
-          </a:prstGeom>
-          <a:solidFill>
-            <a:srgbClr val="F3F2F1"/>
-          </a:solidFill>
-          <a:ln w="9525">
-            <a:solidFill>
-              <a:srgbClr val="B3B3B3"/>
-            </a:solidFill>
-            <a:prstDash val="dash"/>
-          </a:ln>
-        </p:spPr>
-      </p:sp>
-      <p:sp>
-        <p:nvSpPr>
-          <p:cNvPr id="95" name="Text 93"/>
-          <p:cNvSpPr/>
-          <p:nvPr/>
-        </p:nvSpPr>
-        <p:spPr>
-          <a:xfrm>
-            <a:off x="5262372" y="3195828"/>
-            <a:ext cx="219456" cy="219456"/>
-          </a:xfrm>
-          <a:prstGeom prst="rect">
-            <a:avLst/>
-          </a:prstGeom>
-          <a:noFill/>
-          <a:ln/>
-        </p:spPr>
-        <p:txBody>
-          <a:bodyPr wrap="square" lIns="0" tIns="0" rIns="0" bIns="0" rtlCol="0" anchor="ctr"/>
-          <a:lstStyle/>
-          <a:p>
-            <a:pPr algn="ctr" indent="0" marL="0">
-              <a:buNone/>
-            </a:pPr>
-            <a:r>
-              <a:rPr lang="en-US" sz="450" dirty="0">
-                <a:solidFill>
-                  <a:srgbClr val="8A8886"/>
-                </a:solidFill>
-                <a:latin typeface="Segoe UI" pitchFamily="34" charset="0"/>
-                <a:ea typeface="Segoe UI" pitchFamily="34" charset="-122"/>
-                <a:cs typeface="Segoe UI" pitchFamily="34" charset="-120"/>
-              </a:rPr>
-              <a:t>LOGO</a:t>
-            </a:r>
-            <a:endParaRPr lang="en-US" sz="450" dirty="0"/>
-          </a:p>
-        </p:txBody>
-      </p:sp>
-      <p:sp>
-        <p:nvSpPr>
-          <p:cNvPr id="96" name="Text 94"/>
+          <a:prstGeom prst="rect">
+            <a:avLst/>
+          </a:prstGeom>
+        </p:spPr>
+      </p:pic>
+      <p:sp>
+        <p:nvSpPr>
+          <p:cNvPr id="85" name="Text 72"/>
           <p:cNvSpPr/>
           <p:nvPr/>
         </p:nvSpPr>
@@ -4584,7 +4122,7 @@
       </p:sp>
       <p:sp>
         <p:nvSpPr>
-          <p:cNvPr id="97" name="Text 95"/>
+          <p:cNvPr id="86" name="Text 73"/>
           <p:cNvSpPr/>
           <p:nvPr/>
         </p:nvSpPr>
@@ -4646,7 +4184,7 @@
       </p:sp>
       <p:sp>
         <p:nvSpPr>
-          <p:cNvPr id="98" name="Shape 96"/>
+          <p:cNvPr id="87" name="Shape 74"/>
           <p:cNvSpPr/>
           <p:nvPr/>
         </p:nvSpPr>
@@ -4671,7 +4209,7 @@
       </p:sp>
       <p:sp>
         <p:nvSpPr>
-          <p:cNvPr id="99" name="Text 97"/>
+          <p:cNvPr id="88" name="Text 75"/>
           <p:cNvSpPr/>
           <p:nvPr/>
         </p:nvSpPr>
@@ -4710,7 +4248,7 @@
       </p:sp>
       <p:sp>
         <p:nvSpPr>
-          <p:cNvPr id="100" name="Shape 98"/>
+          <p:cNvPr id="89" name="Shape 76"/>
           <p:cNvSpPr/>
           <p:nvPr/>
         </p:nvSpPr>
@@ -4742,75 +4280,33 @@
           </a:effectLst>
         </p:spPr>
       </p:sp>
-      <p:sp>
-        <p:nvSpPr>
-          <p:cNvPr id="101" name="Shape 99"/>
-          <p:cNvSpPr/>
-          <p:nvPr/>
-        </p:nvSpPr>
+      <p:pic>
+        <p:nvPicPr>
+          <p:cNvPr id="90" name="Image 11" descr="preencoded.png">    </p:cNvPr>
+          <p:cNvPicPr>
+            <a:picLocks noChangeAspect="1"/>
+          </p:cNvPicPr>
+          <p:nvPr/>
+        </p:nvPicPr>
+        <p:blipFill>
+          <a:blip r:embed="rId12"/>
+          <a:stretch>
+            <a:fillRect/>
+          </a:stretch>
+        </p:blipFill>
         <p:spPr>
           <a:xfrm>
             <a:off x="6629400" y="3195828"/>
             <a:ext cx="219456" cy="219456"/>
           </a:xfrm>
-          <a:prstGeom prst="roundRect">
-            <a:avLst>
-              <a:gd name="adj" fmla="val 12500"/>
-            </a:avLst>
-          </a:prstGeom>
-          <a:solidFill>
-            <a:srgbClr val="F3F2F1"/>
-          </a:solidFill>
-          <a:ln w="9525">
-            <a:solidFill>
-              <a:srgbClr val="B3B3B3"/>
-            </a:solidFill>
-            <a:prstDash val="dash"/>
-          </a:ln>
-        </p:spPr>
-      </p:sp>
-      <p:sp>
-        <p:nvSpPr>
-          <p:cNvPr id="102" name="Text 100"/>
-          <p:cNvSpPr/>
-          <p:nvPr/>
-        </p:nvSpPr>
-        <p:spPr>
-          <a:xfrm>
-            <a:off x="6629400" y="3195828"/>
-            <a:ext cx="219456" cy="219456"/>
-          </a:xfrm>
-          <a:prstGeom prst="rect">
-            <a:avLst/>
-          </a:prstGeom>
-          <a:noFill/>
-          <a:ln/>
-        </p:spPr>
-        <p:txBody>
-          <a:bodyPr wrap="square" lIns="0" tIns="0" rIns="0" bIns="0" rtlCol="0" anchor="ctr"/>
-          <a:lstStyle/>
-          <a:p>
-            <a:pPr algn="ctr" indent="0" marL="0">
-              <a:buNone/>
-            </a:pPr>
-            <a:r>
-              <a:rPr lang="en-US" sz="450" dirty="0">
-                <a:solidFill>
-                  <a:srgbClr val="8A8886"/>
-                </a:solidFill>
-                <a:latin typeface="Segoe UI" pitchFamily="34" charset="0"/>
-                <a:ea typeface="Segoe UI" pitchFamily="34" charset="-122"/>
-                <a:cs typeface="Segoe UI" pitchFamily="34" charset="-120"/>
-              </a:rPr>
-              <a:t>LOGO</a:t>
-            </a:r>
-            <a:endParaRPr lang="en-US" sz="450" dirty="0"/>
-          </a:p>
-        </p:txBody>
-      </p:sp>
-      <p:sp>
-        <p:nvSpPr>
-          <p:cNvPr id="103" name="Text 101"/>
+          <a:prstGeom prst="rect">
+            <a:avLst/>
+          </a:prstGeom>
+        </p:spPr>
+      </p:pic>
+      <p:sp>
+        <p:nvSpPr>
+          <p:cNvPr id="91" name="Text 77"/>
           <p:cNvSpPr/>
           <p:nvPr/>
         </p:nvSpPr>
@@ -4872,7 +4368,7 @@
       </p:sp>
       <p:sp>
         <p:nvSpPr>
-          <p:cNvPr id="104" name="Text 102"/>
+          <p:cNvPr id="92" name="Text 78"/>
           <p:cNvSpPr/>
           <p:nvPr/>
         </p:nvSpPr>
@@ -4934,7 +4430,7 @@
       </p:sp>
       <p:sp>
         <p:nvSpPr>
-          <p:cNvPr id="105" name="Shape 103"/>
+          <p:cNvPr id="93" name="Shape 79"/>
           <p:cNvSpPr/>
           <p:nvPr/>
         </p:nvSpPr>
@@ -4959,7 +4455,7 @@
       </p:sp>
       <p:sp>
         <p:nvSpPr>
-          <p:cNvPr id="106" name="Text 104"/>
+          <p:cNvPr id="94" name="Text 80"/>
           <p:cNvSpPr/>
           <p:nvPr/>
         </p:nvSpPr>
@@ -4998,7 +4494,7 @@
       </p:sp>
       <p:sp>
         <p:nvSpPr>
-          <p:cNvPr id="107" name="Shape 105"/>
+          <p:cNvPr id="95" name="Shape 81"/>
           <p:cNvSpPr/>
           <p:nvPr/>
         </p:nvSpPr>
@@ -5022,7 +4518,7 @@
       </p:sp>
       <p:sp>
         <p:nvSpPr>
-          <p:cNvPr id="108" name="Shape 106"/>
+          <p:cNvPr id="96" name="Shape 82"/>
           <p:cNvSpPr/>
           <p:nvPr/>
         </p:nvSpPr>
@@ -5046,7 +4542,7 @@
       </p:sp>
       <p:sp>
         <p:nvSpPr>
-          <p:cNvPr id="109" name="Shape 107"/>
+          <p:cNvPr id="97" name="Shape 83"/>
           <p:cNvSpPr/>
           <p:nvPr/>
         </p:nvSpPr>
@@ -5070,7 +4566,7 @@
       </p:sp>
       <p:sp>
         <p:nvSpPr>
-          <p:cNvPr id="110" name="Shape 108"/>
+          <p:cNvPr id="98" name="Shape 84"/>
           <p:cNvSpPr/>
           <p:nvPr/>
         </p:nvSpPr>
@@ -5094,7 +4590,7 @@
       </p:sp>
       <p:sp>
         <p:nvSpPr>
-          <p:cNvPr id="111" name="Shape 109"/>
+          <p:cNvPr id="99" name="Shape 85"/>
           <p:cNvSpPr/>
           <p:nvPr/>
         </p:nvSpPr>
@@ -5119,7 +4615,7 @@
       </p:sp>
       <p:sp>
         <p:nvSpPr>
-          <p:cNvPr id="112" name="Shape 110"/>
+          <p:cNvPr id="100" name="Shape 86"/>
           <p:cNvSpPr/>
           <p:nvPr/>
         </p:nvSpPr>
@@ -5146,7 +4642,7 @@
       </p:sp>
       <p:sp>
         <p:nvSpPr>
-          <p:cNvPr id="113" name="Shape 111"/>
+          <p:cNvPr id="101" name="Shape 87"/>
           <p:cNvSpPr/>
           <p:nvPr/>
         </p:nvSpPr>
@@ -5178,75 +4674,33 @@
           </a:effectLst>
         </p:spPr>
       </p:sp>
-      <p:sp>
-        <p:nvSpPr>
-          <p:cNvPr id="114" name="Shape 112"/>
-          <p:cNvSpPr/>
-          <p:nvPr/>
-        </p:nvSpPr>
+      <p:pic>
+        <p:nvPicPr>
+          <p:cNvPr id="102" name="Image 12" descr="preencoded.png">    </p:cNvPr>
+          <p:cNvPicPr>
+            <a:picLocks noChangeAspect="1"/>
+          </p:cNvPicPr>
+          <p:nvPr/>
+        </p:nvPicPr>
+        <p:blipFill>
+          <a:blip r:embed="rId13"/>
+          <a:stretch>
+            <a:fillRect/>
+          </a:stretch>
+        </p:blipFill>
         <p:spPr>
           <a:xfrm>
             <a:off x="2528316" y="4732020"/>
             <a:ext cx="219456" cy="219456"/>
           </a:xfrm>
-          <a:prstGeom prst="roundRect">
-            <a:avLst>
-              <a:gd name="adj" fmla="val 12500"/>
-            </a:avLst>
-          </a:prstGeom>
-          <a:solidFill>
-            <a:srgbClr val="F3F2F1"/>
-          </a:solidFill>
-          <a:ln w="9525">
-            <a:solidFill>
-              <a:srgbClr val="B3B3B3"/>
-            </a:solidFill>
-            <a:prstDash val="dash"/>
-          </a:ln>
-        </p:spPr>
-      </p:sp>
-      <p:sp>
-        <p:nvSpPr>
-          <p:cNvPr id="115" name="Text 113"/>
-          <p:cNvSpPr/>
-          <p:nvPr/>
-        </p:nvSpPr>
-        <p:spPr>
-          <a:xfrm>
-            <a:off x="2528316" y="4732020"/>
-            <a:ext cx="219456" cy="219456"/>
-          </a:xfrm>
-          <a:prstGeom prst="rect">
-            <a:avLst/>
-          </a:prstGeom>
-          <a:noFill/>
-          <a:ln/>
-        </p:spPr>
-        <p:txBody>
-          <a:bodyPr wrap="square" lIns="0" tIns="0" rIns="0" bIns="0" rtlCol="0" anchor="ctr"/>
-          <a:lstStyle/>
-          <a:p>
-            <a:pPr algn="ctr" indent="0" marL="0">
-              <a:buNone/>
-            </a:pPr>
-            <a:r>
-              <a:rPr lang="en-US" sz="450" dirty="0">
-                <a:solidFill>
-                  <a:srgbClr val="8A8886"/>
-                </a:solidFill>
-                <a:latin typeface="Segoe UI" pitchFamily="34" charset="0"/>
-                <a:ea typeface="Segoe UI" pitchFamily="34" charset="-122"/>
-                <a:cs typeface="Segoe UI" pitchFamily="34" charset="-120"/>
-              </a:rPr>
-              <a:t>LOGO</a:t>
-            </a:r>
-            <a:endParaRPr lang="en-US" sz="450" dirty="0"/>
-          </a:p>
-        </p:txBody>
-      </p:sp>
-      <p:sp>
-        <p:nvSpPr>
-          <p:cNvPr id="116" name="Text 114"/>
+          <a:prstGeom prst="rect">
+            <a:avLst/>
+          </a:prstGeom>
+        </p:spPr>
+      </p:pic>
+      <p:sp>
+        <p:nvSpPr>
+          <p:cNvPr id="103" name="Text 88"/>
           <p:cNvSpPr/>
           <p:nvPr/>
         </p:nvSpPr>
@@ -5308,7 +4762,7 @@
       </p:sp>
       <p:sp>
         <p:nvSpPr>
-          <p:cNvPr id="117" name="Text 115"/>
+          <p:cNvPr id="104" name="Text 89"/>
           <p:cNvSpPr/>
           <p:nvPr/>
         </p:nvSpPr>
@@ -5370,7 +4824,7 @@
       </p:sp>
       <p:sp>
         <p:nvSpPr>
-          <p:cNvPr id="118" name="Shape 116"/>
+          <p:cNvPr id="105" name="Shape 90"/>
           <p:cNvSpPr/>
           <p:nvPr/>
         </p:nvSpPr>
@@ -5402,75 +4856,33 @@
           </a:effectLst>
         </p:spPr>
       </p:sp>
-      <p:sp>
-        <p:nvSpPr>
-          <p:cNvPr id="119" name="Shape 117"/>
-          <p:cNvSpPr/>
-          <p:nvPr/>
-        </p:nvSpPr>
+      <p:pic>
+        <p:nvPicPr>
+          <p:cNvPr id="106" name="Image 13" descr="preencoded.png">    </p:cNvPr>
+          <p:cNvPicPr>
+            <a:picLocks noChangeAspect="1"/>
+          </p:cNvPicPr>
+          <p:nvPr/>
+        </p:nvPicPr>
+        <p:blipFill>
+          <a:blip r:embed="rId14"/>
+          <a:stretch>
+            <a:fillRect/>
+          </a:stretch>
+        </p:blipFill>
         <p:spPr>
           <a:xfrm>
             <a:off x="3895344" y="4732020"/>
             <a:ext cx="219456" cy="219456"/>
           </a:xfrm>
-          <a:prstGeom prst="roundRect">
-            <a:avLst>
-              <a:gd name="adj" fmla="val 12500"/>
-            </a:avLst>
-          </a:prstGeom>
-          <a:solidFill>
-            <a:srgbClr val="F3F2F1"/>
-          </a:solidFill>
-          <a:ln w="9525">
-            <a:solidFill>
-              <a:srgbClr val="B3B3B3"/>
-            </a:solidFill>
-            <a:prstDash val="dash"/>
-          </a:ln>
-        </p:spPr>
-      </p:sp>
-      <p:sp>
-        <p:nvSpPr>
-          <p:cNvPr id="120" name="Text 118"/>
-          <p:cNvSpPr/>
-          <p:nvPr/>
-        </p:nvSpPr>
-        <p:spPr>
-          <a:xfrm>
-            <a:off x="3895344" y="4732020"/>
-            <a:ext cx="219456" cy="219456"/>
-          </a:xfrm>
-          <a:prstGeom prst="rect">
-            <a:avLst/>
-          </a:prstGeom>
-          <a:noFill/>
-          <a:ln/>
-        </p:spPr>
-        <p:txBody>
-          <a:bodyPr wrap="square" lIns="0" tIns="0" rIns="0" bIns="0" rtlCol="0" anchor="ctr"/>
-          <a:lstStyle/>
-          <a:p>
-            <a:pPr algn="ctr" indent="0" marL="0">
-              <a:buNone/>
-            </a:pPr>
-            <a:r>
-              <a:rPr lang="en-US" sz="450" dirty="0">
-                <a:solidFill>
-                  <a:srgbClr val="8A8886"/>
-                </a:solidFill>
-                <a:latin typeface="Segoe UI" pitchFamily="34" charset="0"/>
-                <a:ea typeface="Segoe UI" pitchFamily="34" charset="-122"/>
-                <a:cs typeface="Segoe UI" pitchFamily="34" charset="-120"/>
-              </a:rPr>
-              <a:t>LOGO</a:t>
-            </a:r>
-            <a:endParaRPr lang="en-US" sz="450" dirty="0"/>
-          </a:p>
-        </p:txBody>
-      </p:sp>
-      <p:sp>
-        <p:nvSpPr>
-          <p:cNvPr id="121" name="Text 119"/>
+          <a:prstGeom prst="rect">
+            <a:avLst/>
+          </a:prstGeom>
+        </p:spPr>
+      </p:pic>
+      <p:sp>
+        <p:nvSpPr>
+          <p:cNvPr id="107" name="Text 91"/>
           <p:cNvSpPr/>
           <p:nvPr/>
         </p:nvSpPr>
@@ -5512,7 +4924,7 @@
       </p:sp>
       <p:sp>
         <p:nvSpPr>
-          <p:cNvPr id="122" name="Text 120"/>
+          <p:cNvPr id="108" name="Text 92"/>
           <p:cNvSpPr/>
           <p:nvPr/>
         </p:nvSpPr>
@@ -5574,7 +4986,7 @@
       </p:sp>
       <p:sp>
         <p:nvSpPr>
-          <p:cNvPr id="123" name="Shape 121"/>
+          <p:cNvPr id="109" name="Shape 93"/>
           <p:cNvSpPr/>
           <p:nvPr/>
         </p:nvSpPr>
@@ -5606,75 +5018,33 @@
           </a:effectLst>
         </p:spPr>
       </p:sp>
-      <p:sp>
-        <p:nvSpPr>
-          <p:cNvPr id="124" name="Shape 122"/>
-          <p:cNvSpPr/>
-          <p:nvPr/>
-        </p:nvSpPr>
+      <p:pic>
+        <p:nvPicPr>
+          <p:cNvPr id="110" name="Image 14" descr="preencoded.png">    </p:cNvPr>
+          <p:cNvPicPr>
+            <a:picLocks noChangeAspect="1"/>
+          </p:cNvPicPr>
+          <p:nvPr/>
+        </p:nvPicPr>
+        <p:blipFill>
+          <a:blip r:embed="rId15"/>
+          <a:stretch>
+            <a:fillRect/>
+          </a:stretch>
+        </p:blipFill>
         <p:spPr>
           <a:xfrm>
             <a:off x="5262372" y="4732020"/>
             <a:ext cx="219456" cy="219456"/>
           </a:xfrm>
-          <a:prstGeom prst="roundRect">
-            <a:avLst>
-              <a:gd name="adj" fmla="val 12500"/>
-            </a:avLst>
-          </a:prstGeom>
-          <a:solidFill>
-            <a:srgbClr val="F3F2F1"/>
-          </a:solidFill>
-          <a:ln w="9525">
-            <a:solidFill>
-              <a:srgbClr val="B3B3B3"/>
-            </a:solidFill>
-            <a:prstDash val="dash"/>
-          </a:ln>
-        </p:spPr>
-      </p:sp>
-      <p:sp>
-        <p:nvSpPr>
-          <p:cNvPr id="125" name="Text 123"/>
-          <p:cNvSpPr/>
-          <p:nvPr/>
-        </p:nvSpPr>
-        <p:spPr>
-          <a:xfrm>
-            <a:off x="5262372" y="4732020"/>
-            <a:ext cx="219456" cy="219456"/>
-          </a:xfrm>
-          <a:prstGeom prst="rect">
-            <a:avLst/>
-          </a:prstGeom>
-          <a:noFill/>
-          <a:ln/>
-        </p:spPr>
-        <p:txBody>
-          <a:bodyPr wrap="square" lIns="0" tIns="0" rIns="0" bIns="0" rtlCol="0" anchor="ctr"/>
-          <a:lstStyle/>
-          <a:p>
-            <a:pPr algn="ctr" indent="0" marL="0">
-              <a:buNone/>
-            </a:pPr>
-            <a:r>
-              <a:rPr lang="en-US" sz="450" dirty="0">
-                <a:solidFill>
-                  <a:srgbClr val="8A8886"/>
-                </a:solidFill>
-                <a:latin typeface="Segoe UI" pitchFamily="34" charset="0"/>
-                <a:ea typeface="Segoe UI" pitchFamily="34" charset="-122"/>
-                <a:cs typeface="Segoe UI" pitchFamily="34" charset="-120"/>
-              </a:rPr>
-              <a:t>LOGO</a:t>
-            </a:r>
-            <a:endParaRPr lang="en-US" sz="450" dirty="0"/>
-          </a:p>
-        </p:txBody>
-      </p:sp>
-      <p:sp>
-        <p:nvSpPr>
-          <p:cNvPr id="126" name="Text 124"/>
+          <a:prstGeom prst="rect">
+            <a:avLst/>
+          </a:prstGeom>
+        </p:spPr>
+      </p:pic>
+      <p:sp>
+        <p:nvSpPr>
+          <p:cNvPr id="111" name="Text 94"/>
           <p:cNvSpPr/>
           <p:nvPr/>
         </p:nvSpPr>
@@ -5736,7 +5106,7 @@
       </p:sp>
       <p:sp>
         <p:nvSpPr>
-          <p:cNvPr id="127" name="Text 125"/>
+          <p:cNvPr id="112" name="Text 95"/>
           <p:cNvSpPr/>
           <p:nvPr/>
         </p:nvSpPr>
@@ -5798,7 +5168,7 @@
       </p:sp>
       <p:sp>
         <p:nvSpPr>
-          <p:cNvPr id="128" name="Shape 126"/>
+          <p:cNvPr id="113" name="Shape 96"/>
           <p:cNvSpPr/>
           <p:nvPr/>
         </p:nvSpPr>
@@ -5830,75 +5200,33 @@
           </a:effectLst>
         </p:spPr>
       </p:sp>
-      <p:sp>
-        <p:nvSpPr>
-          <p:cNvPr id="129" name="Shape 127"/>
-          <p:cNvSpPr/>
-          <p:nvPr/>
-        </p:nvSpPr>
+      <p:pic>
+        <p:nvPicPr>
+          <p:cNvPr id="114" name="Image 15" descr="preencoded.png">    </p:cNvPr>
+          <p:cNvPicPr>
+            <a:picLocks noChangeAspect="1"/>
+          </p:cNvPicPr>
+          <p:nvPr/>
+        </p:nvPicPr>
+        <p:blipFill>
+          <a:blip r:embed="rId16"/>
+          <a:stretch>
+            <a:fillRect/>
+          </a:stretch>
+        </p:blipFill>
         <p:spPr>
           <a:xfrm>
             <a:off x="6629400" y="4732020"/>
             <a:ext cx="219456" cy="219456"/>
           </a:xfrm>
-          <a:prstGeom prst="roundRect">
-            <a:avLst>
-              <a:gd name="adj" fmla="val 12500"/>
-            </a:avLst>
-          </a:prstGeom>
-          <a:solidFill>
-            <a:srgbClr val="F3F2F1"/>
-          </a:solidFill>
-          <a:ln w="9525">
-            <a:solidFill>
-              <a:srgbClr val="B3B3B3"/>
-            </a:solidFill>
-            <a:prstDash val="dash"/>
-          </a:ln>
-        </p:spPr>
-      </p:sp>
-      <p:sp>
-        <p:nvSpPr>
-          <p:cNvPr id="130" name="Text 128"/>
-          <p:cNvSpPr/>
-          <p:nvPr/>
-        </p:nvSpPr>
-        <p:spPr>
-          <a:xfrm>
-            <a:off x="6629400" y="4732020"/>
-            <a:ext cx="219456" cy="219456"/>
-          </a:xfrm>
-          <a:prstGeom prst="rect">
-            <a:avLst/>
-          </a:prstGeom>
-          <a:noFill/>
-          <a:ln/>
-        </p:spPr>
-        <p:txBody>
-          <a:bodyPr wrap="square" lIns="0" tIns="0" rIns="0" bIns="0" rtlCol="0" anchor="ctr"/>
-          <a:lstStyle/>
-          <a:p>
-            <a:pPr algn="ctr" indent="0" marL="0">
-              <a:buNone/>
-            </a:pPr>
-            <a:r>
-              <a:rPr lang="en-US" sz="450" dirty="0">
-                <a:solidFill>
-                  <a:srgbClr val="8A8886"/>
-                </a:solidFill>
-                <a:latin typeface="Segoe UI" pitchFamily="34" charset="0"/>
-                <a:ea typeface="Segoe UI" pitchFamily="34" charset="-122"/>
-                <a:cs typeface="Segoe UI" pitchFamily="34" charset="-120"/>
-              </a:rPr>
-              <a:t>LOGO</a:t>
-            </a:r>
-            <a:endParaRPr lang="en-US" sz="450" dirty="0"/>
-          </a:p>
-        </p:txBody>
-      </p:sp>
-      <p:sp>
-        <p:nvSpPr>
-          <p:cNvPr id="131" name="Text 129"/>
+          <a:prstGeom prst="rect">
+            <a:avLst/>
+          </a:prstGeom>
+        </p:spPr>
+      </p:pic>
+      <p:sp>
+        <p:nvSpPr>
+          <p:cNvPr id="115" name="Text 97"/>
           <p:cNvSpPr/>
           <p:nvPr/>
         </p:nvSpPr>
@@ -5940,7 +5268,7 @@
       </p:sp>
       <p:sp>
         <p:nvSpPr>
-          <p:cNvPr id="132" name="Text 130"/>
+          <p:cNvPr id="116" name="Text 98"/>
           <p:cNvSpPr/>
           <p:nvPr/>
         </p:nvSpPr>
@@ -5982,7 +5310,7 @@
       </p:sp>
       <p:sp>
         <p:nvSpPr>
-          <p:cNvPr id="133" name="Shape 131"/>
+          <p:cNvPr id="117" name="Shape 99"/>
           <p:cNvSpPr/>
           <p:nvPr/>
         </p:nvSpPr>
@@ -6006,7 +5334,7 @@
       </p:sp>
       <p:sp>
         <p:nvSpPr>
-          <p:cNvPr id="134" name="Shape 132"/>
+          <p:cNvPr id="118" name="Shape 100"/>
           <p:cNvSpPr/>
           <p:nvPr/>
         </p:nvSpPr>
@@ -6030,7 +5358,7 @@
       </p:sp>
       <p:sp>
         <p:nvSpPr>
-          <p:cNvPr id="135" name="Shape 133"/>
+          <p:cNvPr id="119" name="Shape 101"/>
           <p:cNvSpPr/>
           <p:nvPr/>
         </p:nvSpPr>
@@ -6054,7 +5382,7 @@
       </p:sp>
       <p:sp>
         <p:nvSpPr>
-          <p:cNvPr id="136" name="Shape 134"/>
+          <p:cNvPr id="120" name="Shape 102"/>
           <p:cNvSpPr/>
           <p:nvPr/>
         </p:nvSpPr>
@@ -6078,7 +5406,7 @@
       </p:sp>
       <p:sp>
         <p:nvSpPr>
-          <p:cNvPr id="137" name="Shape 135"/>
+          <p:cNvPr id="121" name="Shape 103"/>
           <p:cNvSpPr/>
           <p:nvPr/>
         </p:nvSpPr>
@@ -6102,7 +5430,7 @@
       </p:sp>
       <p:sp>
         <p:nvSpPr>
-          <p:cNvPr id="138" name="Shape 136"/>
+          <p:cNvPr id="122" name="Shape 104"/>
           <p:cNvSpPr/>
           <p:nvPr/>
         </p:nvSpPr>
@@ -6126,7 +5454,7 @@
       </p:sp>
       <p:sp>
         <p:nvSpPr>
-          <p:cNvPr id="139" name="Text 137"/>
+          <p:cNvPr id="123" name="Text 105"/>
           <p:cNvSpPr/>
           <p:nvPr/>
         </p:nvSpPr>
@@ -6181,7 +5509,7 @@
       </p:sp>
       <p:sp>
         <p:nvSpPr>
-          <p:cNvPr id="140" name="Shape 138"/>
+          <p:cNvPr id="124" name="Shape 106"/>
           <p:cNvSpPr/>
           <p:nvPr/>
         </p:nvSpPr>
@@ -6208,7 +5536,7 @@
       </p:sp>
       <p:sp>
         <p:nvSpPr>
-          <p:cNvPr id="141" name="Text 139"/>
+          <p:cNvPr id="125" name="Text 107"/>
           <p:cNvSpPr/>
           <p:nvPr/>
         </p:nvSpPr>
@@ -6247,7 +5575,7 @@
       </p:sp>
       <p:sp>
         <p:nvSpPr>
-          <p:cNvPr id="142" name="Text 140"/>
+          <p:cNvPr id="126" name="Text 108"/>
           <p:cNvSpPr/>
           <p:nvPr/>
         </p:nvSpPr>
@@ -6469,7 +5797,7 @@
       </p:sp>
       <p:sp>
         <p:nvSpPr>
-          <p:cNvPr id="143" name="Shape 141"/>
+          <p:cNvPr id="127" name="Shape 109"/>
           <p:cNvSpPr/>
           <p:nvPr/>
         </p:nvSpPr>
@@ -6501,75 +5829,33 @@
           </a:effectLst>
         </p:spPr>
       </p:sp>
-      <p:sp>
-        <p:nvSpPr>
-          <p:cNvPr id="144" name="Shape 142"/>
-          <p:cNvSpPr/>
-          <p:nvPr/>
-        </p:nvSpPr>
+      <p:pic>
+        <p:nvPicPr>
+          <p:cNvPr id="128" name="Image 16" descr="preencoded.png">    </p:cNvPr>
+          <p:cNvPicPr>
+            <a:picLocks noChangeAspect="1"/>
+          </p:cNvPicPr>
+          <p:nvPr/>
+        </p:nvPicPr>
+        <p:blipFill>
+          <a:blip r:embed="rId17"/>
+          <a:stretch>
+            <a:fillRect/>
+          </a:stretch>
+        </p:blipFill>
         <p:spPr>
           <a:xfrm>
             <a:off x="8275320" y="4384548"/>
             <a:ext cx="219456" cy="219456"/>
           </a:xfrm>
-          <a:prstGeom prst="roundRect">
-            <a:avLst>
-              <a:gd name="adj" fmla="val 12500"/>
-            </a:avLst>
-          </a:prstGeom>
-          <a:solidFill>
-            <a:srgbClr val="F3F2F1"/>
-          </a:solidFill>
-          <a:ln w="9525">
-            <a:solidFill>
-              <a:srgbClr val="B3B3B3"/>
-            </a:solidFill>
-            <a:prstDash val="dash"/>
-          </a:ln>
-        </p:spPr>
-      </p:sp>
-      <p:sp>
-        <p:nvSpPr>
-          <p:cNvPr id="145" name="Text 143"/>
-          <p:cNvSpPr/>
-          <p:nvPr/>
-        </p:nvSpPr>
-        <p:spPr>
-          <a:xfrm>
-            <a:off x="8275320" y="4384548"/>
-            <a:ext cx="219456" cy="219456"/>
-          </a:xfrm>
-          <a:prstGeom prst="rect">
-            <a:avLst/>
-          </a:prstGeom>
-          <a:noFill/>
-          <a:ln/>
-        </p:spPr>
-        <p:txBody>
-          <a:bodyPr wrap="square" lIns="0" tIns="0" rIns="0" bIns="0" rtlCol="0" anchor="ctr"/>
-          <a:lstStyle/>
-          <a:p>
-            <a:pPr algn="ctr" indent="0" marL="0">
-              <a:buNone/>
-            </a:pPr>
-            <a:r>
-              <a:rPr lang="en-US" sz="450" dirty="0">
-                <a:solidFill>
-                  <a:srgbClr val="8A8886"/>
-                </a:solidFill>
-                <a:latin typeface="Segoe UI" pitchFamily="34" charset="0"/>
-                <a:ea typeface="Segoe UI" pitchFamily="34" charset="-122"/>
-                <a:cs typeface="Segoe UI" pitchFamily="34" charset="-120"/>
-              </a:rPr>
-              <a:t>LOGO</a:t>
-            </a:r>
-            <a:endParaRPr lang="en-US" sz="450" dirty="0"/>
-          </a:p>
-        </p:txBody>
-      </p:sp>
-      <p:sp>
-        <p:nvSpPr>
-          <p:cNvPr id="146" name="Text 144"/>
+          <a:prstGeom prst="rect">
+            <a:avLst/>
+          </a:prstGeom>
+        </p:spPr>
+      </p:pic>
+      <p:sp>
+        <p:nvSpPr>
+          <p:cNvPr id="129" name="Text 110"/>
           <p:cNvSpPr/>
           <p:nvPr/>
         </p:nvSpPr>
@@ -6611,7 +5897,7 @@
       </p:sp>
       <p:sp>
         <p:nvSpPr>
-          <p:cNvPr id="147" name="Text 145"/>
+          <p:cNvPr id="130" name="Text 111"/>
           <p:cNvSpPr/>
           <p:nvPr/>
         </p:nvSpPr>
@@ -6693,7 +5979,7 @@
       </p:sp>
       <p:sp>
         <p:nvSpPr>
-          <p:cNvPr id="148" name="Text 146"/>
+          <p:cNvPr id="131" name="Text 112"/>
           <p:cNvSpPr/>
           <p:nvPr/>
         </p:nvSpPr>
@@ -6735,7 +6021,7 @@
       </p:sp>
       <p:sp>
         <p:nvSpPr>
-          <p:cNvPr id="149" name="Text 147"/>
+          <p:cNvPr id="132" name="Text 113"/>
           <p:cNvSpPr/>
           <p:nvPr/>
         </p:nvSpPr>
@@ -6774,7 +6060,7 @@
       </p:sp>
       <p:sp>
         <p:nvSpPr>
-          <p:cNvPr id="150" name="Shape 148"/>
+          <p:cNvPr id="133" name="Shape 114"/>
           <p:cNvSpPr/>
           <p:nvPr/>
         </p:nvSpPr>
@@ -6801,7 +6087,7 @@
       </p:sp>
       <p:sp>
         <p:nvSpPr>
-          <p:cNvPr id="151" name="Text 149"/>
+          <p:cNvPr id="134" name="Text 115"/>
           <p:cNvSpPr/>
           <p:nvPr/>
         </p:nvSpPr>
@@ -6840,7 +6126,7 @@
       </p:sp>
       <p:sp>
         <p:nvSpPr>
-          <p:cNvPr id="152" name="Shape 150"/>
+          <p:cNvPr id="135" name="Shape 116"/>
           <p:cNvSpPr/>
           <p:nvPr/>
         </p:nvSpPr>
@@ -6867,7 +6153,7 @@
       </p:sp>
       <p:sp>
         <p:nvSpPr>
-          <p:cNvPr id="153" name="Text 151"/>
+          <p:cNvPr id="136" name="Text 117"/>
           <p:cNvSpPr/>
           <p:nvPr/>
         </p:nvSpPr>
@@ -6906,7 +6192,7 @@
       </p:sp>
       <p:sp>
         <p:nvSpPr>
-          <p:cNvPr id="154" name="Shape 152"/>
+          <p:cNvPr id="137" name="Shape 118"/>
           <p:cNvSpPr/>
           <p:nvPr/>
         </p:nvSpPr>
@@ -6933,7 +6219,7 @@
       </p:sp>
       <p:sp>
         <p:nvSpPr>
-          <p:cNvPr id="155" name="Text 153"/>
+          <p:cNvPr id="138" name="Text 119"/>
           <p:cNvSpPr/>
           <p:nvPr/>
         </p:nvSpPr>
@@ -6972,7 +6258,7 @@
       </p:sp>
       <p:sp>
         <p:nvSpPr>
-          <p:cNvPr id="156" name="Shape 154"/>
+          <p:cNvPr id="139" name="Shape 120"/>
           <p:cNvSpPr/>
           <p:nvPr/>
         </p:nvSpPr>
@@ -6999,7 +6285,7 @@
       </p:sp>
       <p:sp>
         <p:nvSpPr>
-          <p:cNvPr id="157" name="Text 155"/>
+          <p:cNvPr id="140" name="Text 121"/>
           <p:cNvSpPr/>
           <p:nvPr/>
         </p:nvSpPr>
@@ -7030,7 +6316,7 @@
                 <a:ea typeface="Segoe UI" pitchFamily="34" charset="-122"/>
                 <a:cs typeface="Segoe UI" pitchFamily="34" charset="-120"/>
               </a:rPr>
-              <a:t>Emplacement réservé au logo — à remplacer</a:t>
+              <a:t>Emplacement réservé à votre logo (en-tête)</a:t>
             </a:r>
             <a:endParaRPr lang="en-US" sz="700" dirty="0"/>
           </a:p>
@@ -7038,7 +6324,7 @@
       </p:sp>
       <p:sp>
         <p:nvSpPr>
-          <p:cNvPr id="158" name="Text 156"/>
+          <p:cNvPr id="141" name="Text 122"/>
           <p:cNvSpPr/>
           <p:nvPr/>
         </p:nvSpPr>
@@ -9276,75 +8562,33 @@
           </a:effectLst>
         </p:spPr>
       </p:sp>
-      <p:sp>
-        <p:nvSpPr>
-          <p:cNvPr id="8" name="Shape 6"/>
-          <p:cNvSpPr/>
-          <p:nvPr/>
-        </p:nvSpPr>
+      <p:pic>
+        <p:nvPicPr>
+          <p:cNvPr id="8" name="Image 0" descr="preencoded.png">    </p:cNvPr>
+          <p:cNvPicPr>
+            <a:picLocks noChangeAspect="1"/>
+          </p:cNvPicPr>
+          <p:nvPr/>
+        </p:nvPicPr>
+        <p:blipFill>
+          <a:blip r:embed="rId1"/>
+          <a:stretch>
+            <a:fillRect/>
+          </a:stretch>
+        </p:blipFill>
         <p:spPr>
           <a:xfrm>
             <a:off x="521208" y="1243584"/>
             <a:ext cx="310896" cy="310896"/>
           </a:xfrm>
-          <a:prstGeom prst="roundRect">
-            <a:avLst>
-              <a:gd name="adj" fmla="val 8824"/>
-            </a:avLst>
-          </a:prstGeom>
-          <a:solidFill>
-            <a:srgbClr val="F3F2F1"/>
-          </a:solidFill>
-          <a:ln w="9525">
-            <a:solidFill>
-              <a:srgbClr val="B3B3B3"/>
-            </a:solidFill>
-            <a:prstDash val="dash"/>
-          </a:ln>
-        </p:spPr>
-      </p:sp>
-      <p:sp>
-        <p:nvSpPr>
-          <p:cNvPr id="9" name="Text 7"/>
-          <p:cNvSpPr/>
-          <p:nvPr/>
-        </p:nvSpPr>
-        <p:spPr>
-          <a:xfrm>
-            <a:off x="521208" y="1243584"/>
-            <a:ext cx="310896" cy="310896"/>
-          </a:xfrm>
-          <a:prstGeom prst="rect">
-            <a:avLst/>
-          </a:prstGeom>
-          <a:noFill/>
-          <a:ln/>
-        </p:spPr>
-        <p:txBody>
-          <a:bodyPr wrap="square" lIns="0" tIns="0" rIns="0" bIns="0" rtlCol="0" anchor="ctr"/>
-          <a:lstStyle/>
-          <a:p>
-            <a:pPr algn="ctr" indent="0" marL="0">
-              <a:buNone/>
-            </a:pPr>
-            <a:r>
-              <a:rPr lang="en-US" sz="450" dirty="0">
-                <a:solidFill>
-                  <a:srgbClr val="8A8886"/>
-                </a:solidFill>
-                <a:latin typeface="Segoe UI" pitchFamily="34" charset="0"/>
-                <a:ea typeface="Segoe UI" pitchFamily="34" charset="-122"/>
-                <a:cs typeface="Segoe UI" pitchFamily="34" charset="-120"/>
-              </a:rPr>
-              <a:t>LOGO</a:t>
-            </a:r>
-            <a:endParaRPr lang="en-US" sz="450" dirty="0"/>
-          </a:p>
-        </p:txBody>
-      </p:sp>
-      <p:sp>
-        <p:nvSpPr>
-          <p:cNvPr id="10" name="Text 8"/>
+          <a:prstGeom prst="rect">
+            <a:avLst/>
+          </a:prstGeom>
+        </p:spPr>
+      </p:pic>
+      <p:sp>
+        <p:nvSpPr>
+          <p:cNvPr id="9" name="Text 6"/>
           <p:cNvSpPr/>
           <p:nvPr/>
         </p:nvSpPr>
@@ -9383,7 +8627,7 @@
       </p:sp>
       <p:sp>
         <p:nvSpPr>
-          <p:cNvPr id="11" name="Text 9"/>
+          <p:cNvPr id="10" name="Text 7"/>
           <p:cNvSpPr/>
           <p:nvPr/>
         </p:nvSpPr>
@@ -9477,7 +8721,7 @@
       </p:sp>
       <p:sp>
         <p:nvSpPr>
-          <p:cNvPr id="12" name="Shape 10"/>
+          <p:cNvPr id="11" name="Shape 8"/>
           <p:cNvSpPr/>
           <p:nvPr/>
         </p:nvSpPr>
@@ -9509,75 +8753,33 @@
           </a:effectLst>
         </p:spPr>
       </p:sp>
-      <p:sp>
-        <p:nvSpPr>
-          <p:cNvPr id="13" name="Shape 11"/>
-          <p:cNvSpPr/>
-          <p:nvPr/>
-        </p:nvSpPr>
+      <p:pic>
+        <p:nvPicPr>
+          <p:cNvPr id="12" name="Image 1" descr="preencoded.png">    </p:cNvPr>
+          <p:cNvPicPr>
+            <a:picLocks noChangeAspect="1"/>
+          </p:cNvPicPr>
+          <p:nvPr/>
+        </p:nvPicPr>
+        <p:blipFill>
+          <a:blip r:embed="rId2"/>
+          <a:stretch>
+            <a:fillRect/>
+          </a:stretch>
+        </p:blipFill>
         <p:spPr>
           <a:xfrm>
             <a:off x="4434840" y="1243584"/>
             <a:ext cx="310896" cy="310896"/>
           </a:xfrm>
-          <a:prstGeom prst="roundRect">
-            <a:avLst>
-              <a:gd name="adj" fmla="val 8824"/>
-            </a:avLst>
-          </a:prstGeom>
-          <a:solidFill>
-            <a:srgbClr val="F3F2F1"/>
-          </a:solidFill>
-          <a:ln w="9525">
-            <a:solidFill>
-              <a:srgbClr val="B3B3B3"/>
-            </a:solidFill>
-            <a:prstDash val="dash"/>
-          </a:ln>
-        </p:spPr>
-      </p:sp>
-      <p:sp>
-        <p:nvSpPr>
-          <p:cNvPr id="14" name="Text 12"/>
-          <p:cNvSpPr/>
-          <p:nvPr/>
-        </p:nvSpPr>
-        <p:spPr>
-          <a:xfrm>
-            <a:off x="4434840" y="1243584"/>
-            <a:ext cx="310896" cy="310896"/>
-          </a:xfrm>
-          <a:prstGeom prst="rect">
-            <a:avLst/>
-          </a:prstGeom>
-          <a:noFill/>
-          <a:ln/>
-        </p:spPr>
-        <p:txBody>
-          <a:bodyPr wrap="square" lIns="0" tIns="0" rIns="0" bIns="0" rtlCol="0" anchor="ctr"/>
-          <a:lstStyle/>
-          <a:p>
-            <a:pPr algn="ctr" indent="0" marL="0">
-              <a:buNone/>
-            </a:pPr>
-            <a:r>
-              <a:rPr lang="en-US" sz="450" dirty="0">
-                <a:solidFill>
-                  <a:srgbClr val="8A8886"/>
-                </a:solidFill>
-                <a:latin typeface="Segoe UI" pitchFamily="34" charset="0"/>
-                <a:ea typeface="Segoe UI" pitchFamily="34" charset="-122"/>
-                <a:cs typeface="Segoe UI" pitchFamily="34" charset="-120"/>
-              </a:rPr>
-              <a:t>LOGO</a:t>
-            </a:r>
-            <a:endParaRPr lang="en-US" sz="450" dirty="0"/>
-          </a:p>
-        </p:txBody>
-      </p:sp>
-      <p:sp>
-        <p:nvSpPr>
-          <p:cNvPr id="15" name="Text 13"/>
+          <a:prstGeom prst="rect">
+            <a:avLst/>
+          </a:prstGeom>
+        </p:spPr>
+      </p:pic>
+      <p:sp>
+        <p:nvSpPr>
+          <p:cNvPr id="13" name="Text 9"/>
           <p:cNvSpPr/>
           <p:nvPr/>
         </p:nvSpPr>
@@ -9616,7 +8818,7 @@
       </p:sp>
       <p:sp>
         <p:nvSpPr>
-          <p:cNvPr id="16" name="Text 14"/>
+          <p:cNvPr id="14" name="Text 10"/>
           <p:cNvSpPr/>
           <p:nvPr/>
         </p:nvSpPr>
@@ -9710,7 +8912,7 @@
       </p:sp>
       <p:sp>
         <p:nvSpPr>
-          <p:cNvPr id="17" name="Shape 15"/>
+          <p:cNvPr id="15" name="Shape 11"/>
           <p:cNvSpPr/>
           <p:nvPr/>
         </p:nvSpPr>
@@ -9742,75 +8944,33 @@
           </a:effectLst>
         </p:spPr>
       </p:sp>
-      <p:sp>
-        <p:nvSpPr>
-          <p:cNvPr id="18" name="Shape 16"/>
-          <p:cNvSpPr/>
-          <p:nvPr/>
-        </p:nvSpPr>
+      <p:pic>
+        <p:nvPicPr>
+          <p:cNvPr id="16" name="Image 2" descr="preencoded.png">    </p:cNvPr>
+          <p:cNvPicPr>
+            <a:picLocks noChangeAspect="1"/>
+          </p:cNvPicPr>
+          <p:nvPr/>
+        </p:nvPicPr>
+        <p:blipFill>
+          <a:blip r:embed="rId3"/>
+          <a:stretch>
+            <a:fillRect/>
+          </a:stretch>
+        </p:blipFill>
         <p:spPr>
           <a:xfrm>
             <a:off x="8348472" y="1243584"/>
             <a:ext cx="310896" cy="310896"/>
           </a:xfrm>
-          <a:prstGeom prst="roundRect">
-            <a:avLst>
-              <a:gd name="adj" fmla="val 8824"/>
-            </a:avLst>
-          </a:prstGeom>
-          <a:solidFill>
-            <a:srgbClr val="F3F2F1"/>
-          </a:solidFill>
-          <a:ln w="9525">
-            <a:solidFill>
-              <a:srgbClr val="B3B3B3"/>
-            </a:solidFill>
-            <a:prstDash val="dash"/>
-          </a:ln>
-        </p:spPr>
-      </p:sp>
-      <p:sp>
-        <p:nvSpPr>
-          <p:cNvPr id="19" name="Text 17"/>
-          <p:cNvSpPr/>
-          <p:nvPr/>
-        </p:nvSpPr>
-        <p:spPr>
-          <a:xfrm>
-            <a:off x="8348472" y="1243584"/>
-            <a:ext cx="310896" cy="310896"/>
-          </a:xfrm>
-          <a:prstGeom prst="rect">
-            <a:avLst/>
-          </a:prstGeom>
-          <a:noFill/>
-          <a:ln/>
-        </p:spPr>
-        <p:txBody>
-          <a:bodyPr wrap="square" lIns="0" tIns="0" rIns="0" bIns="0" rtlCol="0" anchor="ctr"/>
-          <a:lstStyle/>
-          <a:p>
-            <a:pPr algn="ctr" indent="0" marL="0">
-              <a:buNone/>
-            </a:pPr>
-            <a:r>
-              <a:rPr lang="en-US" sz="450" dirty="0">
-                <a:solidFill>
-                  <a:srgbClr val="8A8886"/>
-                </a:solidFill>
-                <a:latin typeface="Segoe UI" pitchFamily="34" charset="0"/>
-                <a:ea typeface="Segoe UI" pitchFamily="34" charset="-122"/>
-                <a:cs typeface="Segoe UI" pitchFamily="34" charset="-120"/>
-              </a:rPr>
-              <a:t>LOGO</a:t>
-            </a:r>
-            <a:endParaRPr lang="en-US" sz="450" dirty="0"/>
-          </a:p>
-        </p:txBody>
-      </p:sp>
-      <p:sp>
-        <p:nvSpPr>
-          <p:cNvPr id="20" name="Text 18"/>
+          <a:prstGeom prst="rect">
+            <a:avLst/>
+          </a:prstGeom>
+        </p:spPr>
+      </p:pic>
+      <p:sp>
+        <p:nvSpPr>
+          <p:cNvPr id="17" name="Text 12"/>
           <p:cNvSpPr/>
           <p:nvPr/>
         </p:nvSpPr>
@@ -9849,7 +9009,7 @@
       </p:sp>
       <p:sp>
         <p:nvSpPr>
-          <p:cNvPr id="21" name="Text 19"/>
+          <p:cNvPr id="18" name="Text 13"/>
           <p:cNvSpPr/>
           <p:nvPr/>
         </p:nvSpPr>
@@ -9943,7 +9103,7 @@
       </p:sp>
       <p:sp>
         <p:nvSpPr>
-          <p:cNvPr id="22" name="Shape 20"/>
+          <p:cNvPr id="19" name="Shape 14"/>
           <p:cNvSpPr/>
           <p:nvPr/>
         </p:nvSpPr>
@@ -9970,7 +9130,7 @@
       </p:sp>
       <p:sp>
         <p:nvSpPr>
-          <p:cNvPr id="23" name="Text 21"/>
+          <p:cNvPr id="20" name="Text 15"/>
           <p:cNvSpPr/>
           <p:nvPr/>
         </p:nvSpPr>
@@ -10009,7 +9169,7 @@
       </p:sp>
       <p:sp>
         <p:nvSpPr>
-          <p:cNvPr id="24" name="Text 22"/>
+          <p:cNvPr id="21" name="Text 16"/>
           <p:cNvSpPr/>
           <p:nvPr/>
         </p:nvSpPr>
@@ -10091,7 +9251,7 @@
       </p:sp>
       <p:sp>
         <p:nvSpPr>
-          <p:cNvPr id="25" name="Shape 23"/>
+          <p:cNvPr id="22" name="Shape 17"/>
           <p:cNvSpPr/>
           <p:nvPr/>
         </p:nvSpPr>
@@ -10118,7 +9278,7 @@
       </p:sp>
       <p:sp>
         <p:nvSpPr>
-          <p:cNvPr id="26" name="Text 24"/>
+          <p:cNvPr id="23" name="Text 18"/>
           <p:cNvSpPr/>
           <p:nvPr/>
         </p:nvSpPr>
@@ -10157,7 +9317,7 @@
       </p:sp>
       <p:sp>
         <p:nvSpPr>
-          <p:cNvPr id="27" name="Text 25"/>
+          <p:cNvPr id="24" name="Text 19"/>
           <p:cNvSpPr/>
           <p:nvPr/>
         </p:nvSpPr>
